--- a/public/videos/repositories/map-search/map-search-tech-preview.pptx
+++ b/public/videos/repositories/map-search/map-search-tech-preview.pptx
@@ -134,7 +134,7 @@
           <p:cNvPr id="2" name="タイトル 1">
             <a:extLst>
               <a:ext uri="{FF2B5EF4-FFF2-40B4-BE49-F238E27FC236}">
-                <a16:creationId xmlns:a16="http://schemas.microsoft.com/office/drawing/2014/main" id="{043D0511-1623-220E-B32D-CCBDE31E0BD3}"/>
+                <a16:creationId xmlns:a16="http://schemas.microsoft.com/office/drawing/2014/main" id="{2C98A4DB-9FC8-6E2B-D8B5-E8E5D010BDDE}"/>
               </a:ext>
             </a:extLst>
           </p:cNvPr>
@@ -171,7 +171,7 @@
           <p:cNvPr id="3" name="字幕 2">
             <a:extLst>
               <a:ext uri="{FF2B5EF4-FFF2-40B4-BE49-F238E27FC236}">
-                <a16:creationId xmlns:a16="http://schemas.microsoft.com/office/drawing/2014/main" id="{46BF2D3A-58BE-94E2-B6EA-6D3359B5C74B}"/>
+                <a16:creationId xmlns:a16="http://schemas.microsoft.com/office/drawing/2014/main" id="{AD554193-081C-2222-8029-4B4EDCDDC1A1}"/>
               </a:ext>
             </a:extLst>
           </p:cNvPr>
@@ -241,7 +241,7 @@
           <p:cNvPr id="4" name="日付プレースホルダー 3">
             <a:extLst>
               <a:ext uri="{FF2B5EF4-FFF2-40B4-BE49-F238E27FC236}">
-                <a16:creationId xmlns:a16="http://schemas.microsoft.com/office/drawing/2014/main" id="{8165BDFE-B482-F0B1-874D-5792874DB4F0}"/>
+                <a16:creationId xmlns:a16="http://schemas.microsoft.com/office/drawing/2014/main" id="{9A8BFD3D-1A9A-9BAD-5DE2-E38DFA0B1FE3}"/>
               </a:ext>
             </a:extLst>
           </p:cNvPr>
@@ -257,7 +257,7 @@
           <a:bodyPr/>
           <a:lstStyle/>
           <a:p>
-            <a:fld id="{BDF5E7EA-258D-41FC-A4A8-903EE98C1CB2}" type="datetimeFigureOut">
+            <a:fld id="{0FB6FC17-8C7C-449E-BD4A-07BA56EDFDF1}" type="datetimeFigureOut">
               <a:rPr kumimoji="1" lang="ja-JP" altLang="en-US" smtClean="0"/>
               <a:t>2026/7/30</a:t>
             </a:fld>
@@ -270,7 +270,7 @@
           <p:cNvPr id="5" name="フッター プレースホルダー 4">
             <a:extLst>
               <a:ext uri="{FF2B5EF4-FFF2-40B4-BE49-F238E27FC236}">
-                <a16:creationId xmlns:a16="http://schemas.microsoft.com/office/drawing/2014/main" id="{DD0475B4-4729-A0EF-C3F1-A252277392F3}"/>
+                <a16:creationId xmlns:a16="http://schemas.microsoft.com/office/drawing/2014/main" id="{71883D39-8267-36FD-BFC4-085C88631638}"/>
               </a:ext>
             </a:extLst>
           </p:cNvPr>
@@ -295,7 +295,7 @@
           <p:cNvPr id="6" name="スライド番号プレースホルダー 5">
             <a:extLst>
               <a:ext uri="{FF2B5EF4-FFF2-40B4-BE49-F238E27FC236}">
-                <a16:creationId xmlns:a16="http://schemas.microsoft.com/office/drawing/2014/main" id="{5DC42AD4-DCF6-00E3-4AC1-9AFD2670910E}"/>
+                <a16:creationId xmlns:a16="http://schemas.microsoft.com/office/drawing/2014/main" id="{E8101836-F2E8-BE4F-33FE-A9EDC3CBC7D4}"/>
               </a:ext>
             </a:extLst>
           </p:cNvPr>
@@ -311,7 +311,7 @@
           <a:bodyPr/>
           <a:lstStyle/>
           <a:p>
-            <a:fld id="{824EB639-B339-47AD-877E-C14FD39140E0}" type="slidenum">
+            <a:fld id="{31E1BAFF-54C0-4196-8E78-B9FB4140FEC4}" type="slidenum">
               <a:rPr kumimoji="1" lang="ja-JP" altLang="en-US" smtClean="0"/>
               <a:t>‹#›</a:t>
             </a:fld>
@@ -322,7 +322,7 @@
     </p:spTree>
     <p:extLst>
       <p:ext uri="{BB962C8B-B14F-4D97-AF65-F5344CB8AC3E}">
-        <p14:creationId xmlns:p14="http://schemas.microsoft.com/office/powerpoint/2010/main" val="1913043405"/>
+        <p14:creationId xmlns:p14="http://schemas.microsoft.com/office/powerpoint/2010/main" val="14060338"/>
       </p:ext>
     </p:extLst>
   </p:cSld>
@@ -354,7 +354,7 @@
           <p:cNvPr id="2" name="タイトル 1">
             <a:extLst>
               <a:ext uri="{FF2B5EF4-FFF2-40B4-BE49-F238E27FC236}">
-                <a16:creationId xmlns:a16="http://schemas.microsoft.com/office/drawing/2014/main" id="{35251D81-EFA4-C073-9502-19577C3A039D}"/>
+                <a16:creationId xmlns:a16="http://schemas.microsoft.com/office/drawing/2014/main" id="{A7427BAB-06A4-2883-093A-A443D61B64C7}"/>
               </a:ext>
             </a:extLst>
           </p:cNvPr>
@@ -382,7 +382,7 @@
           <p:cNvPr id="3" name="縦書きテキスト プレースホルダー 2">
             <a:extLst>
               <a:ext uri="{FF2B5EF4-FFF2-40B4-BE49-F238E27FC236}">
-                <a16:creationId xmlns:a16="http://schemas.microsoft.com/office/drawing/2014/main" id="{A6D44261-D7AC-0A0E-4999-FF626AB7343B}"/>
+                <a16:creationId xmlns:a16="http://schemas.microsoft.com/office/drawing/2014/main" id="{EFD941D3-F752-7ED8-F17F-D87999B4B1B4}"/>
               </a:ext>
             </a:extLst>
           </p:cNvPr>
@@ -471,7 +471,7 @@
           <p:cNvPr id="4" name="日付プレースホルダー 3">
             <a:extLst>
               <a:ext uri="{FF2B5EF4-FFF2-40B4-BE49-F238E27FC236}">
-                <a16:creationId xmlns:a16="http://schemas.microsoft.com/office/drawing/2014/main" id="{718FF094-6B44-5B1D-7FA9-66574B0745E6}"/>
+                <a16:creationId xmlns:a16="http://schemas.microsoft.com/office/drawing/2014/main" id="{94E32997-5F6E-E921-5689-875DA58DA20F}"/>
               </a:ext>
             </a:extLst>
           </p:cNvPr>
@@ -487,7 +487,7 @@
           <a:bodyPr/>
           <a:lstStyle/>
           <a:p>
-            <a:fld id="{BDF5E7EA-258D-41FC-A4A8-903EE98C1CB2}" type="datetimeFigureOut">
+            <a:fld id="{0FB6FC17-8C7C-449E-BD4A-07BA56EDFDF1}" type="datetimeFigureOut">
               <a:rPr kumimoji="1" lang="ja-JP" altLang="en-US" smtClean="0"/>
               <a:t>2026/7/30</a:t>
             </a:fld>
@@ -500,7 +500,7 @@
           <p:cNvPr id="5" name="フッター プレースホルダー 4">
             <a:extLst>
               <a:ext uri="{FF2B5EF4-FFF2-40B4-BE49-F238E27FC236}">
-                <a16:creationId xmlns:a16="http://schemas.microsoft.com/office/drawing/2014/main" id="{64862483-E985-401F-7B87-09EEF7C5C084}"/>
+                <a16:creationId xmlns:a16="http://schemas.microsoft.com/office/drawing/2014/main" id="{80A53950-6518-F058-2002-66C3DCDD23FA}"/>
               </a:ext>
             </a:extLst>
           </p:cNvPr>
@@ -525,7 +525,7 @@
           <p:cNvPr id="6" name="スライド番号プレースホルダー 5">
             <a:extLst>
               <a:ext uri="{FF2B5EF4-FFF2-40B4-BE49-F238E27FC236}">
-                <a16:creationId xmlns:a16="http://schemas.microsoft.com/office/drawing/2014/main" id="{4E7A7E38-B4F2-6FF4-4983-C34AEC23AA38}"/>
+                <a16:creationId xmlns:a16="http://schemas.microsoft.com/office/drawing/2014/main" id="{D57F8CFD-7C21-554F-210C-0B23E671E62A}"/>
               </a:ext>
             </a:extLst>
           </p:cNvPr>
@@ -541,7 +541,7 @@
           <a:bodyPr/>
           <a:lstStyle/>
           <a:p>
-            <a:fld id="{824EB639-B339-47AD-877E-C14FD39140E0}" type="slidenum">
+            <a:fld id="{31E1BAFF-54C0-4196-8E78-B9FB4140FEC4}" type="slidenum">
               <a:rPr kumimoji="1" lang="ja-JP" altLang="en-US" smtClean="0"/>
               <a:t>‹#›</a:t>
             </a:fld>
@@ -552,7 +552,7 @@
     </p:spTree>
     <p:extLst>
       <p:ext uri="{BB962C8B-B14F-4D97-AF65-F5344CB8AC3E}">
-        <p14:creationId xmlns:p14="http://schemas.microsoft.com/office/powerpoint/2010/main" val="1931115551"/>
+        <p14:creationId xmlns:p14="http://schemas.microsoft.com/office/powerpoint/2010/main" val="993310997"/>
       </p:ext>
     </p:extLst>
   </p:cSld>
@@ -584,7 +584,7 @@
           <p:cNvPr id="2" name="縦書きタイトル 1">
             <a:extLst>
               <a:ext uri="{FF2B5EF4-FFF2-40B4-BE49-F238E27FC236}">
-                <a16:creationId xmlns:a16="http://schemas.microsoft.com/office/drawing/2014/main" id="{94E6CF71-32D0-424C-4593-7753C787379C}"/>
+                <a16:creationId xmlns:a16="http://schemas.microsoft.com/office/drawing/2014/main" id="{E3AAB538-C1B4-EE1E-7BB6-E57974362D69}"/>
               </a:ext>
             </a:extLst>
           </p:cNvPr>
@@ -617,7 +617,7 @@
           <p:cNvPr id="3" name="縦書きテキスト プレースホルダー 2">
             <a:extLst>
               <a:ext uri="{FF2B5EF4-FFF2-40B4-BE49-F238E27FC236}">
-                <a16:creationId xmlns:a16="http://schemas.microsoft.com/office/drawing/2014/main" id="{C015FC94-1569-A5BF-4FBA-8332C6A02F04}"/>
+                <a16:creationId xmlns:a16="http://schemas.microsoft.com/office/drawing/2014/main" id="{4B07F67D-0A52-4D5D-30B9-1C4627DCFB90}"/>
               </a:ext>
             </a:extLst>
           </p:cNvPr>
@@ -711,7 +711,7 @@
           <p:cNvPr id="4" name="日付プレースホルダー 3">
             <a:extLst>
               <a:ext uri="{FF2B5EF4-FFF2-40B4-BE49-F238E27FC236}">
-                <a16:creationId xmlns:a16="http://schemas.microsoft.com/office/drawing/2014/main" id="{E89F6F79-9D47-33D5-C992-56C00FD75F27}"/>
+                <a16:creationId xmlns:a16="http://schemas.microsoft.com/office/drawing/2014/main" id="{4BABE35A-CF35-8886-01B3-6754C658CB1F}"/>
               </a:ext>
             </a:extLst>
           </p:cNvPr>
@@ -727,7 +727,7 @@
           <a:bodyPr/>
           <a:lstStyle/>
           <a:p>
-            <a:fld id="{BDF5E7EA-258D-41FC-A4A8-903EE98C1CB2}" type="datetimeFigureOut">
+            <a:fld id="{0FB6FC17-8C7C-449E-BD4A-07BA56EDFDF1}" type="datetimeFigureOut">
               <a:rPr kumimoji="1" lang="ja-JP" altLang="en-US" smtClean="0"/>
               <a:t>2026/7/30</a:t>
             </a:fld>
@@ -740,7 +740,7 @@
           <p:cNvPr id="5" name="フッター プレースホルダー 4">
             <a:extLst>
               <a:ext uri="{FF2B5EF4-FFF2-40B4-BE49-F238E27FC236}">
-                <a16:creationId xmlns:a16="http://schemas.microsoft.com/office/drawing/2014/main" id="{FA2BE855-6D52-5B35-08F1-975CA7FB58B4}"/>
+                <a16:creationId xmlns:a16="http://schemas.microsoft.com/office/drawing/2014/main" id="{071E24E2-3D4F-2399-2A62-B09055D2D02B}"/>
               </a:ext>
             </a:extLst>
           </p:cNvPr>
@@ -765,7 +765,7 @@
           <p:cNvPr id="6" name="スライド番号プレースホルダー 5">
             <a:extLst>
               <a:ext uri="{FF2B5EF4-FFF2-40B4-BE49-F238E27FC236}">
-                <a16:creationId xmlns:a16="http://schemas.microsoft.com/office/drawing/2014/main" id="{6E90B695-6756-FE10-DE64-FAABD9B0A92E}"/>
+                <a16:creationId xmlns:a16="http://schemas.microsoft.com/office/drawing/2014/main" id="{BAC1AA08-027A-E61D-BFD9-510A438EEEFC}"/>
               </a:ext>
             </a:extLst>
           </p:cNvPr>
@@ -781,7 +781,7 @@
           <a:bodyPr/>
           <a:lstStyle/>
           <a:p>
-            <a:fld id="{824EB639-B339-47AD-877E-C14FD39140E0}" type="slidenum">
+            <a:fld id="{31E1BAFF-54C0-4196-8E78-B9FB4140FEC4}" type="slidenum">
               <a:rPr kumimoji="1" lang="ja-JP" altLang="en-US" smtClean="0"/>
               <a:t>‹#›</a:t>
             </a:fld>
@@ -792,7 +792,7 @@
     </p:spTree>
     <p:extLst>
       <p:ext uri="{BB962C8B-B14F-4D97-AF65-F5344CB8AC3E}">
-        <p14:creationId xmlns:p14="http://schemas.microsoft.com/office/powerpoint/2010/main" val="1195440787"/>
+        <p14:creationId xmlns:p14="http://schemas.microsoft.com/office/powerpoint/2010/main" val="3012361332"/>
       </p:ext>
     </p:extLst>
   </p:cSld>
@@ -824,7 +824,7 @@
           <p:cNvPr id="2" name="タイトル 1">
             <a:extLst>
               <a:ext uri="{FF2B5EF4-FFF2-40B4-BE49-F238E27FC236}">
-                <a16:creationId xmlns:a16="http://schemas.microsoft.com/office/drawing/2014/main" id="{FD43BE28-72F0-E7C8-E4B1-6B45E922D176}"/>
+                <a16:creationId xmlns:a16="http://schemas.microsoft.com/office/drawing/2014/main" id="{01617CDD-E2CF-DE2F-A0FB-FEE35B6E134B}"/>
               </a:ext>
             </a:extLst>
           </p:cNvPr>
@@ -852,7 +852,7 @@
           <p:cNvPr id="3" name="コンテンツ プレースホルダー 2">
             <a:extLst>
               <a:ext uri="{FF2B5EF4-FFF2-40B4-BE49-F238E27FC236}">
-                <a16:creationId xmlns:a16="http://schemas.microsoft.com/office/drawing/2014/main" id="{500345A4-B952-CE9E-31D3-1A2E93221321}"/>
+                <a16:creationId xmlns:a16="http://schemas.microsoft.com/office/drawing/2014/main" id="{2C6B3C75-A4D1-EC48-18C0-AD1D2825B8B8}"/>
               </a:ext>
             </a:extLst>
           </p:cNvPr>
@@ -941,7 +941,7 @@
           <p:cNvPr id="4" name="日付プレースホルダー 3">
             <a:extLst>
               <a:ext uri="{FF2B5EF4-FFF2-40B4-BE49-F238E27FC236}">
-                <a16:creationId xmlns:a16="http://schemas.microsoft.com/office/drawing/2014/main" id="{E9CA6EC3-AAD8-41BA-7009-25DE9D45DDC3}"/>
+                <a16:creationId xmlns:a16="http://schemas.microsoft.com/office/drawing/2014/main" id="{47EAD4F8-3445-68A6-7EA9-D5EB0E316961}"/>
               </a:ext>
             </a:extLst>
           </p:cNvPr>
@@ -957,7 +957,7 @@
           <a:bodyPr/>
           <a:lstStyle/>
           <a:p>
-            <a:fld id="{BDF5E7EA-258D-41FC-A4A8-903EE98C1CB2}" type="datetimeFigureOut">
+            <a:fld id="{0FB6FC17-8C7C-449E-BD4A-07BA56EDFDF1}" type="datetimeFigureOut">
               <a:rPr kumimoji="1" lang="ja-JP" altLang="en-US" smtClean="0"/>
               <a:t>2026/7/30</a:t>
             </a:fld>
@@ -970,7 +970,7 @@
           <p:cNvPr id="5" name="フッター プレースホルダー 4">
             <a:extLst>
               <a:ext uri="{FF2B5EF4-FFF2-40B4-BE49-F238E27FC236}">
-                <a16:creationId xmlns:a16="http://schemas.microsoft.com/office/drawing/2014/main" id="{75F6160D-5545-8370-7679-63480B09FE4F}"/>
+                <a16:creationId xmlns:a16="http://schemas.microsoft.com/office/drawing/2014/main" id="{85E93415-E8EC-D1A2-6731-BFA82023B55F}"/>
               </a:ext>
             </a:extLst>
           </p:cNvPr>
@@ -995,7 +995,7 @@
           <p:cNvPr id="6" name="スライド番号プレースホルダー 5">
             <a:extLst>
               <a:ext uri="{FF2B5EF4-FFF2-40B4-BE49-F238E27FC236}">
-                <a16:creationId xmlns:a16="http://schemas.microsoft.com/office/drawing/2014/main" id="{6DFD95D3-3AD7-5151-4258-B3FA8802C5E2}"/>
+                <a16:creationId xmlns:a16="http://schemas.microsoft.com/office/drawing/2014/main" id="{4D34E732-0CD0-00EF-DCE5-FA2D267E6BA9}"/>
               </a:ext>
             </a:extLst>
           </p:cNvPr>
@@ -1011,7 +1011,7 @@
           <a:bodyPr/>
           <a:lstStyle/>
           <a:p>
-            <a:fld id="{824EB639-B339-47AD-877E-C14FD39140E0}" type="slidenum">
+            <a:fld id="{31E1BAFF-54C0-4196-8E78-B9FB4140FEC4}" type="slidenum">
               <a:rPr kumimoji="1" lang="ja-JP" altLang="en-US" smtClean="0"/>
               <a:t>‹#›</a:t>
             </a:fld>
@@ -1022,7 +1022,7 @@
     </p:spTree>
     <p:extLst>
       <p:ext uri="{BB962C8B-B14F-4D97-AF65-F5344CB8AC3E}">
-        <p14:creationId xmlns:p14="http://schemas.microsoft.com/office/powerpoint/2010/main" val="1807342176"/>
+        <p14:creationId xmlns:p14="http://schemas.microsoft.com/office/powerpoint/2010/main" val="1474142434"/>
       </p:ext>
     </p:extLst>
   </p:cSld>
@@ -1054,7 +1054,7 @@
           <p:cNvPr id="2" name="タイトル 1">
             <a:extLst>
               <a:ext uri="{FF2B5EF4-FFF2-40B4-BE49-F238E27FC236}">
-                <a16:creationId xmlns:a16="http://schemas.microsoft.com/office/drawing/2014/main" id="{6BE7B6F1-131F-5045-0988-961C1B16480C}"/>
+                <a16:creationId xmlns:a16="http://schemas.microsoft.com/office/drawing/2014/main" id="{A6811159-325C-4467-E17A-EE758ACB7960}"/>
               </a:ext>
             </a:extLst>
           </p:cNvPr>
@@ -1091,7 +1091,7 @@
           <p:cNvPr id="3" name="テキスト プレースホルダー 2">
             <a:extLst>
               <a:ext uri="{FF2B5EF4-FFF2-40B4-BE49-F238E27FC236}">
-                <a16:creationId xmlns:a16="http://schemas.microsoft.com/office/drawing/2014/main" id="{414B7B59-F96B-3206-A4A2-0DA7A5401635}"/>
+                <a16:creationId xmlns:a16="http://schemas.microsoft.com/office/drawing/2014/main" id="{9026396E-B55B-DCC1-CDBC-E9C64675119C}"/>
               </a:ext>
             </a:extLst>
           </p:cNvPr>
@@ -1216,7 +1216,7 @@
           <p:cNvPr id="4" name="日付プレースホルダー 3">
             <a:extLst>
               <a:ext uri="{FF2B5EF4-FFF2-40B4-BE49-F238E27FC236}">
-                <a16:creationId xmlns:a16="http://schemas.microsoft.com/office/drawing/2014/main" id="{88A41840-B9DB-416B-D748-A300D451994A}"/>
+                <a16:creationId xmlns:a16="http://schemas.microsoft.com/office/drawing/2014/main" id="{7E1EFC76-8FD8-C83D-EBF6-CE91AC567F83}"/>
               </a:ext>
             </a:extLst>
           </p:cNvPr>
@@ -1232,7 +1232,7 @@
           <a:bodyPr/>
           <a:lstStyle/>
           <a:p>
-            <a:fld id="{BDF5E7EA-258D-41FC-A4A8-903EE98C1CB2}" type="datetimeFigureOut">
+            <a:fld id="{0FB6FC17-8C7C-449E-BD4A-07BA56EDFDF1}" type="datetimeFigureOut">
               <a:rPr kumimoji="1" lang="ja-JP" altLang="en-US" smtClean="0"/>
               <a:t>2026/7/30</a:t>
             </a:fld>
@@ -1245,7 +1245,7 @@
           <p:cNvPr id="5" name="フッター プレースホルダー 4">
             <a:extLst>
               <a:ext uri="{FF2B5EF4-FFF2-40B4-BE49-F238E27FC236}">
-                <a16:creationId xmlns:a16="http://schemas.microsoft.com/office/drawing/2014/main" id="{45B96E97-601D-B8D5-7E48-F2279962DE8A}"/>
+                <a16:creationId xmlns:a16="http://schemas.microsoft.com/office/drawing/2014/main" id="{C1191FA8-C8D3-09D5-4C83-C9B5A18E3419}"/>
               </a:ext>
             </a:extLst>
           </p:cNvPr>
@@ -1270,7 +1270,7 @@
           <p:cNvPr id="6" name="スライド番号プレースホルダー 5">
             <a:extLst>
               <a:ext uri="{FF2B5EF4-FFF2-40B4-BE49-F238E27FC236}">
-                <a16:creationId xmlns:a16="http://schemas.microsoft.com/office/drawing/2014/main" id="{E0095DEB-18C2-57F6-A946-4F3042D6377D}"/>
+                <a16:creationId xmlns:a16="http://schemas.microsoft.com/office/drawing/2014/main" id="{50EC4166-BC65-0263-1191-A8907D8DA249}"/>
               </a:ext>
             </a:extLst>
           </p:cNvPr>
@@ -1286,7 +1286,7 @@
           <a:bodyPr/>
           <a:lstStyle/>
           <a:p>
-            <a:fld id="{824EB639-B339-47AD-877E-C14FD39140E0}" type="slidenum">
+            <a:fld id="{31E1BAFF-54C0-4196-8E78-B9FB4140FEC4}" type="slidenum">
               <a:rPr kumimoji="1" lang="ja-JP" altLang="en-US" smtClean="0"/>
               <a:t>‹#›</a:t>
             </a:fld>
@@ -1297,7 +1297,7 @@
     </p:spTree>
     <p:extLst>
       <p:ext uri="{BB962C8B-B14F-4D97-AF65-F5344CB8AC3E}">
-        <p14:creationId xmlns:p14="http://schemas.microsoft.com/office/powerpoint/2010/main" val="4228875965"/>
+        <p14:creationId xmlns:p14="http://schemas.microsoft.com/office/powerpoint/2010/main" val="3244184265"/>
       </p:ext>
     </p:extLst>
   </p:cSld>
@@ -1329,7 +1329,7 @@
           <p:cNvPr id="2" name="タイトル 1">
             <a:extLst>
               <a:ext uri="{FF2B5EF4-FFF2-40B4-BE49-F238E27FC236}">
-                <a16:creationId xmlns:a16="http://schemas.microsoft.com/office/drawing/2014/main" id="{904AC10D-0B71-23C1-14CC-BA9F0DFA485C}"/>
+                <a16:creationId xmlns:a16="http://schemas.microsoft.com/office/drawing/2014/main" id="{04FDD4F6-6D85-7D71-783E-0FA6F8E27922}"/>
               </a:ext>
             </a:extLst>
           </p:cNvPr>
@@ -1357,7 +1357,7 @@
           <p:cNvPr id="3" name="コンテンツ プレースホルダー 2">
             <a:extLst>
               <a:ext uri="{FF2B5EF4-FFF2-40B4-BE49-F238E27FC236}">
-                <a16:creationId xmlns:a16="http://schemas.microsoft.com/office/drawing/2014/main" id="{DBDABF8C-9EEC-185F-C651-B61A414A9D6F}"/>
+                <a16:creationId xmlns:a16="http://schemas.microsoft.com/office/drawing/2014/main" id="{A61A56C1-2BFE-6334-C404-0CF69D3E08CC}"/>
               </a:ext>
             </a:extLst>
           </p:cNvPr>
@@ -1451,7 +1451,7 @@
           <p:cNvPr id="4" name="コンテンツ プレースホルダー 3">
             <a:extLst>
               <a:ext uri="{FF2B5EF4-FFF2-40B4-BE49-F238E27FC236}">
-                <a16:creationId xmlns:a16="http://schemas.microsoft.com/office/drawing/2014/main" id="{E030DFB0-B00D-9278-B391-9D28BF2DF204}"/>
+                <a16:creationId xmlns:a16="http://schemas.microsoft.com/office/drawing/2014/main" id="{A9D77E3B-E9E4-6C2B-A89C-8E8F6A34AF2A}"/>
               </a:ext>
             </a:extLst>
           </p:cNvPr>
@@ -1545,7 +1545,7 @@
           <p:cNvPr id="5" name="日付プレースホルダー 4">
             <a:extLst>
               <a:ext uri="{FF2B5EF4-FFF2-40B4-BE49-F238E27FC236}">
-                <a16:creationId xmlns:a16="http://schemas.microsoft.com/office/drawing/2014/main" id="{3487286E-36B5-EDA9-27A7-C4E380B2A90F}"/>
+                <a16:creationId xmlns:a16="http://schemas.microsoft.com/office/drawing/2014/main" id="{D444E1B7-7B4F-ED39-039D-BCFD955AC1D6}"/>
               </a:ext>
             </a:extLst>
           </p:cNvPr>
@@ -1561,7 +1561,7 @@
           <a:bodyPr/>
           <a:lstStyle/>
           <a:p>
-            <a:fld id="{BDF5E7EA-258D-41FC-A4A8-903EE98C1CB2}" type="datetimeFigureOut">
+            <a:fld id="{0FB6FC17-8C7C-449E-BD4A-07BA56EDFDF1}" type="datetimeFigureOut">
               <a:rPr kumimoji="1" lang="ja-JP" altLang="en-US" smtClean="0"/>
               <a:t>2026/7/30</a:t>
             </a:fld>
@@ -1574,7 +1574,7 @@
           <p:cNvPr id="6" name="フッター プレースホルダー 5">
             <a:extLst>
               <a:ext uri="{FF2B5EF4-FFF2-40B4-BE49-F238E27FC236}">
-                <a16:creationId xmlns:a16="http://schemas.microsoft.com/office/drawing/2014/main" id="{48BF126F-DF13-0FB3-C651-D3DB5D8D2F7C}"/>
+                <a16:creationId xmlns:a16="http://schemas.microsoft.com/office/drawing/2014/main" id="{025C2F3A-7EDC-57DC-9B5B-63F88A75955F}"/>
               </a:ext>
             </a:extLst>
           </p:cNvPr>
@@ -1599,7 +1599,7 @@
           <p:cNvPr id="7" name="スライド番号プレースホルダー 6">
             <a:extLst>
               <a:ext uri="{FF2B5EF4-FFF2-40B4-BE49-F238E27FC236}">
-                <a16:creationId xmlns:a16="http://schemas.microsoft.com/office/drawing/2014/main" id="{6CDDD638-DFD0-83D7-5FBF-6FADD234730C}"/>
+                <a16:creationId xmlns:a16="http://schemas.microsoft.com/office/drawing/2014/main" id="{3DD11996-8F76-6FE6-FC00-3E0560385DE5}"/>
               </a:ext>
             </a:extLst>
           </p:cNvPr>
@@ -1615,7 +1615,7 @@
           <a:bodyPr/>
           <a:lstStyle/>
           <a:p>
-            <a:fld id="{824EB639-B339-47AD-877E-C14FD39140E0}" type="slidenum">
+            <a:fld id="{31E1BAFF-54C0-4196-8E78-B9FB4140FEC4}" type="slidenum">
               <a:rPr kumimoji="1" lang="ja-JP" altLang="en-US" smtClean="0"/>
               <a:t>‹#›</a:t>
             </a:fld>
@@ -1626,7 +1626,7 @@
     </p:spTree>
     <p:extLst>
       <p:ext uri="{BB962C8B-B14F-4D97-AF65-F5344CB8AC3E}">
-        <p14:creationId xmlns:p14="http://schemas.microsoft.com/office/powerpoint/2010/main" val="4237731801"/>
+        <p14:creationId xmlns:p14="http://schemas.microsoft.com/office/powerpoint/2010/main" val="3485154697"/>
       </p:ext>
     </p:extLst>
   </p:cSld>
@@ -1658,7 +1658,7 @@
           <p:cNvPr id="2" name="タイトル 1">
             <a:extLst>
               <a:ext uri="{FF2B5EF4-FFF2-40B4-BE49-F238E27FC236}">
-                <a16:creationId xmlns:a16="http://schemas.microsoft.com/office/drawing/2014/main" id="{CFBE03D5-4FEF-EAEE-BD15-486AA2E6F11D}"/>
+                <a16:creationId xmlns:a16="http://schemas.microsoft.com/office/drawing/2014/main" id="{38315096-8B18-DF2A-46BA-2CE652BEFAFB}"/>
               </a:ext>
             </a:extLst>
           </p:cNvPr>
@@ -1691,7 +1691,7 @@
           <p:cNvPr id="3" name="テキスト プレースホルダー 2">
             <a:extLst>
               <a:ext uri="{FF2B5EF4-FFF2-40B4-BE49-F238E27FC236}">
-                <a16:creationId xmlns:a16="http://schemas.microsoft.com/office/drawing/2014/main" id="{FC514459-F8F2-5560-4963-7D8092D06F84}"/>
+                <a16:creationId xmlns:a16="http://schemas.microsoft.com/office/drawing/2014/main" id="{71FA84BE-DD7C-A976-0614-279384F0FE70}"/>
               </a:ext>
             </a:extLst>
           </p:cNvPr>
@@ -1762,7 +1762,7 @@
           <p:cNvPr id="4" name="コンテンツ プレースホルダー 3">
             <a:extLst>
               <a:ext uri="{FF2B5EF4-FFF2-40B4-BE49-F238E27FC236}">
-                <a16:creationId xmlns:a16="http://schemas.microsoft.com/office/drawing/2014/main" id="{216E30F5-70DD-2186-6FE8-C3AFFA92B16D}"/>
+                <a16:creationId xmlns:a16="http://schemas.microsoft.com/office/drawing/2014/main" id="{84AC6DBB-C2F5-E7A6-6178-EE4753A987AA}"/>
               </a:ext>
             </a:extLst>
           </p:cNvPr>
@@ -1856,7 +1856,7 @@
           <p:cNvPr id="5" name="テキスト プレースホルダー 4">
             <a:extLst>
               <a:ext uri="{FF2B5EF4-FFF2-40B4-BE49-F238E27FC236}">
-                <a16:creationId xmlns:a16="http://schemas.microsoft.com/office/drawing/2014/main" id="{869FAD0B-E854-7CE7-1519-073669329596}"/>
+                <a16:creationId xmlns:a16="http://schemas.microsoft.com/office/drawing/2014/main" id="{FFD23623-3CF2-B2CD-8B20-6BAD736E1F7C}"/>
               </a:ext>
             </a:extLst>
           </p:cNvPr>
@@ -1927,7 +1927,7 @@
           <p:cNvPr id="6" name="コンテンツ プレースホルダー 5">
             <a:extLst>
               <a:ext uri="{FF2B5EF4-FFF2-40B4-BE49-F238E27FC236}">
-                <a16:creationId xmlns:a16="http://schemas.microsoft.com/office/drawing/2014/main" id="{9010E054-126E-BF21-05EE-B63E7F5E6E08}"/>
+                <a16:creationId xmlns:a16="http://schemas.microsoft.com/office/drawing/2014/main" id="{9843ED98-DA34-F739-EB59-1603F8AB4E81}"/>
               </a:ext>
             </a:extLst>
           </p:cNvPr>
@@ -2021,7 +2021,7 @@
           <p:cNvPr id="7" name="日付プレースホルダー 6">
             <a:extLst>
               <a:ext uri="{FF2B5EF4-FFF2-40B4-BE49-F238E27FC236}">
-                <a16:creationId xmlns:a16="http://schemas.microsoft.com/office/drawing/2014/main" id="{D76FE2B4-8721-0110-8D97-4E59488735EB}"/>
+                <a16:creationId xmlns:a16="http://schemas.microsoft.com/office/drawing/2014/main" id="{2904D40B-FEFB-9C85-4D38-3DFE01FE55D3}"/>
               </a:ext>
             </a:extLst>
           </p:cNvPr>
@@ -2037,7 +2037,7 @@
           <a:bodyPr/>
           <a:lstStyle/>
           <a:p>
-            <a:fld id="{BDF5E7EA-258D-41FC-A4A8-903EE98C1CB2}" type="datetimeFigureOut">
+            <a:fld id="{0FB6FC17-8C7C-449E-BD4A-07BA56EDFDF1}" type="datetimeFigureOut">
               <a:rPr kumimoji="1" lang="ja-JP" altLang="en-US" smtClean="0"/>
               <a:t>2026/7/30</a:t>
             </a:fld>
@@ -2050,7 +2050,7 @@
           <p:cNvPr id="8" name="フッター プレースホルダー 7">
             <a:extLst>
               <a:ext uri="{FF2B5EF4-FFF2-40B4-BE49-F238E27FC236}">
-                <a16:creationId xmlns:a16="http://schemas.microsoft.com/office/drawing/2014/main" id="{8B93F461-6725-64DA-A145-A42776A8BD62}"/>
+                <a16:creationId xmlns:a16="http://schemas.microsoft.com/office/drawing/2014/main" id="{51627CFE-BDDF-5BCE-DEE9-40276AFCA325}"/>
               </a:ext>
             </a:extLst>
           </p:cNvPr>
@@ -2075,7 +2075,7 @@
           <p:cNvPr id="9" name="スライド番号プレースホルダー 8">
             <a:extLst>
               <a:ext uri="{FF2B5EF4-FFF2-40B4-BE49-F238E27FC236}">
-                <a16:creationId xmlns:a16="http://schemas.microsoft.com/office/drawing/2014/main" id="{3ED6B298-D7EA-DA8D-0ACB-80C9FD58721B}"/>
+                <a16:creationId xmlns:a16="http://schemas.microsoft.com/office/drawing/2014/main" id="{C2EB9629-AFCE-3E5B-BF4F-00FE65DF1803}"/>
               </a:ext>
             </a:extLst>
           </p:cNvPr>
@@ -2091,7 +2091,7 @@
           <a:bodyPr/>
           <a:lstStyle/>
           <a:p>
-            <a:fld id="{824EB639-B339-47AD-877E-C14FD39140E0}" type="slidenum">
+            <a:fld id="{31E1BAFF-54C0-4196-8E78-B9FB4140FEC4}" type="slidenum">
               <a:rPr kumimoji="1" lang="ja-JP" altLang="en-US" smtClean="0"/>
               <a:t>‹#›</a:t>
             </a:fld>
@@ -2102,7 +2102,7 @@
     </p:spTree>
     <p:extLst>
       <p:ext uri="{BB962C8B-B14F-4D97-AF65-F5344CB8AC3E}">
-        <p14:creationId xmlns:p14="http://schemas.microsoft.com/office/powerpoint/2010/main" val="4014160657"/>
+        <p14:creationId xmlns:p14="http://schemas.microsoft.com/office/powerpoint/2010/main" val="2162008106"/>
       </p:ext>
     </p:extLst>
   </p:cSld>
@@ -2134,7 +2134,7 @@
           <p:cNvPr id="2" name="タイトル 1">
             <a:extLst>
               <a:ext uri="{FF2B5EF4-FFF2-40B4-BE49-F238E27FC236}">
-                <a16:creationId xmlns:a16="http://schemas.microsoft.com/office/drawing/2014/main" id="{B6FC141C-C2E7-425D-BBEF-6186D6E7BAA5}"/>
+                <a16:creationId xmlns:a16="http://schemas.microsoft.com/office/drawing/2014/main" id="{06FE0447-F2A8-C069-EF19-D54C76B9631B}"/>
               </a:ext>
             </a:extLst>
           </p:cNvPr>
@@ -2162,7 +2162,7 @@
           <p:cNvPr id="3" name="日付プレースホルダー 2">
             <a:extLst>
               <a:ext uri="{FF2B5EF4-FFF2-40B4-BE49-F238E27FC236}">
-                <a16:creationId xmlns:a16="http://schemas.microsoft.com/office/drawing/2014/main" id="{9846C18B-9637-37BA-6809-2C495D395163}"/>
+                <a16:creationId xmlns:a16="http://schemas.microsoft.com/office/drawing/2014/main" id="{21C1AEF1-7FBA-8BD1-2E4D-6CEEFE796630}"/>
               </a:ext>
             </a:extLst>
           </p:cNvPr>
@@ -2178,7 +2178,7 @@
           <a:bodyPr/>
           <a:lstStyle/>
           <a:p>
-            <a:fld id="{BDF5E7EA-258D-41FC-A4A8-903EE98C1CB2}" type="datetimeFigureOut">
+            <a:fld id="{0FB6FC17-8C7C-449E-BD4A-07BA56EDFDF1}" type="datetimeFigureOut">
               <a:rPr kumimoji="1" lang="ja-JP" altLang="en-US" smtClean="0"/>
               <a:t>2026/7/30</a:t>
             </a:fld>
@@ -2191,7 +2191,7 @@
           <p:cNvPr id="4" name="フッター プレースホルダー 3">
             <a:extLst>
               <a:ext uri="{FF2B5EF4-FFF2-40B4-BE49-F238E27FC236}">
-                <a16:creationId xmlns:a16="http://schemas.microsoft.com/office/drawing/2014/main" id="{CEC89EB3-D223-52A8-0A19-D2EE0E440844}"/>
+                <a16:creationId xmlns:a16="http://schemas.microsoft.com/office/drawing/2014/main" id="{7F2783EE-31E6-9F56-A5A5-06845D2A3D6D}"/>
               </a:ext>
             </a:extLst>
           </p:cNvPr>
@@ -2216,7 +2216,7 @@
           <p:cNvPr id="5" name="スライド番号プレースホルダー 4">
             <a:extLst>
               <a:ext uri="{FF2B5EF4-FFF2-40B4-BE49-F238E27FC236}">
-                <a16:creationId xmlns:a16="http://schemas.microsoft.com/office/drawing/2014/main" id="{CA8E8B8B-FB88-E55E-A299-CB9217703137}"/>
+                <a16:creationId xmlns:a16="http://schemas.microsoft.com/office/drawing/2014/main" id="{8F0676B4-8037-EF96-AEA0-6AF74A0C8FDA}"/>
               </a:ext>
             </a:extLst>
           </p:cNvPr>
@@ -2232,7 +2232,7 @@
           <a:bodyPr/>
           <a:lstStyle/>
           <a:p>
-            <a:fld id="{824EB639-B339-47AD-877E-C14FD39140E0}" type="slidenum">
+            <a:fld id="{31E1BAFF-54C0-4196-8E78-B9FB4140FEC4}" type="slidenum">
               <a:rPr kumimoji="1" lang="ja-JP" altLang="en-US" smtClean="0"/>
               <a:t>‹#›</a:t>
             </a:fld>
@@ -2243,7 +2243,7 @@
     </p:spTree>
     <p:extLst>
       <p:ext uri="{BB962C8B-B14F-4D97-AF65-F5344CB8AC3E}">
-        <p14:creationId xmlns:p14="http://schemas.microsoft.com/office/powerpoint/2010/main" val="520119149"/>
+        <p14:creationId xmlns:p14="http://schemas.microsoft.com/office/powerpoint/2010/main" val="1301425801"/>
       </p:ext>
     </p:extLst>
   </p:cSld>
@@ -2275,7 +2275,7 @@
           <p:cNvPr id="2" name="日付プレースホルダー 1">
             <a:extLst>
               <a:ext uri="{FF2B5EF4-FFF2-40B4-BE49-F238E27FC236}">
-                <a16:creationId xmlns:a16="http://schemas.microsoft.com/office/drawing/2014/main" id="{3A260294-462B-8BC1-D598-D545A2E22284}"/>
+                <a16:creationId xmlns:a16="http://schemas.microsoft.com/office/drawing/2014/main" id="{0216A36C-7752-9B53-2F5B-486D86132271}"/>
               </a:ext>
             </a:extLst>
           </p:cNvPr>
@@ -2291,7 +2291,7 @@
           <a:bodyPr/>
           <a:lstStyle/>
           <a:p>
-            <a:fld id="{BDF5E7EA-258D-41FC-A4A8-903EE98C1CB2}" type="datetimeFigureOut">
+            <a:fld id="{0FB6FC17-8C7C-449E-BD4A-07BA56EDFDF1}" type="datetimeFigureOut">
               <a:rPr kumimoji="1" lang="ja-JP" altLang="en-US" smtClean="0"/>
               <a:t>2026/7/30</a:t>
             </a:fld>
@@ -2304,7 +2304,7 @@
           <p:cNvPr id="3" name="フッター プレースホルダー 2">
             <a:extLst>
               <a:ext uri="{FF2B5EF4-FFF2-40B4-BE49-F238E27FC236}">
-                <a16:creationId xmlns:a16="http://schemas.microsoft.com/office/drawing/2014/main" id="{002CF220-1DCE-6942-03D4-4D56CD825637}"/>
+                <a16:creationId xmlns:a16="http://schemas.microsoft.com/office/drawing/2014/main" id="{6D2A4272-7021-5CB9-D677-439F03CD4E9C}"/>
               </a:ext>
             </a:extLst>
           </p:cNvPr>
@@ -2329,7 +2329,7 @@
           <p:cNvPr id="4" name="スライド番号プレースホルダー 3">
             <a:extLst>
               <a:ext uri="{FF2B5EF4-FFF2-40B4-BE49-F238E27FC236}">
-                <a16:creationId xmlns:a16="http://schemas.microsoft.com/office/drawing/2014/main" id="{8EDCFB6D-0625-4FF9-4C8D-F340CF260605}"/>
+                <a16:creationId xmlns:a16="http://schemas.microsoft.com/office/drawing/2014/main" id="{1F0774FE-8D47-E61A-730A-257CCA867467}"/>
               </a:ext>
             </a:extLst>
           </p:cNvPr>
@@ -2345,7 +2345,7 @@
           <a:bodyPr/>
           <a:lstStyle/>
           <a:p>
-            <a:fld id="{824EB639-B339-47AD-877E-C14FD39140E0}" type="slidenum">
+            <a:fld id="{31E1BAFF-54C0-4196-8E78-B9FB4140FEC4}" type="slidenum">
               <a:rPr kumimoji="1" lang="ja-JP" altLang="en-US" smtClean="0"/>
               <a:t>‹#›</a:t>
             </a:fld>
@@ -2356,7 +2356,7 @@
     </p:spTree>
     <p:extLst>
       <p:ext uri="{BB962C8B-B14F-4D97-AF65-F5344CB8AC3E}">
-        <p14:creationId xmlns:p14="http://schemas.microsoft.com/office/powerpoint/2010/main" val="3952847102"/>
+        <p14:creationId xmlns:p14="http://schemas.microsoft.com/office/powerpoint/2010/main" val="860571128"/>
       </p:ext>
     </p:extLst>
   </p:cSld>
@@ -2388,7 +2388,7 @@
           <p:cNvPr id="2" name="タイトル 1">
             <a:extLst>
               <a:ext uri="{FF2B5EF4-FFF2-40B4-BE49-F238E27FC236}">
-                <a16:creationId xmlns:a16="http://schemas.microsoft.com/office/drawing/2014/main" id="{35F165D3-E925-87EC-717C-AF27C7F4D9ED}"/>
+                <a16:creationId xmlns:a16="http://schemas.microsoft.com/office/drawing/2014/main" id="{F062EA2E-C075-5CEC-7645-3B856B98E372}"/>
               </a:ext>
             </a:extLst>
           </p:cNvPr>
@@ -2425,7 +2425,7 @@
           <p:cNvPr id="3" name="コンテンツ プレースホルダー 2">
             <a:extLst>
               <a:ext uri="{FF2B5EF4-FFF2-40B4-BE49-F238E27FC236}">
-                <a16:creationId xmlns:a16="http://schemas.microsoft.com/office/drawing/2014/main" id="{3682882D-D5F2-20ED-3FFC-FC547CE6CF9A}"/>
+                <a16:creationId xmlns:a16="http://schemas.microsoft.com/office/drawing/2014/main" id="{0CADE1CF-8754-F44C-A0C4-DBEA14173A85}"/>
               </a:ext>
             </a:extLst>
           </p:cNvPr>
@@ -2547,7 +2547,7 @@
           <p:cNvPr id="4" name="テキスト プレースホルダー 3">
             <a:extLst>
               <a:ext uri="{FF2B5EF4-FFF2-40B4-BE49-F238E27FC236}">
-                <a16:creationId xmlns:a16="http://schemas.microsoft.com/office/drawing/2014/main" id="{A1F421B4-5CDE-6975-7637-4C854C9B2487}"/>
+                <a16:creationId xmlns:a16="http://schemas.microsoft.com/office/drawing/2014/main" id="{339A8C1E-823B-A2AE-21D2-32D351B314D1}"/>
               </a:ext>
             </a:extLst>
           </p:cNvPr>
@@ -2618,7 +2618,7 @@
           <p:cNvPr id="5" name="日付プレースホルダー 4">
             <a:extLst>
               <a:ext uri="{FF2B5EF4-FFF2-40B4-BE49-F238E27FC236}">
-                <a16:creationId xmlns:a16="http://schemas.microsoft.com/office/drawing/2014/main" id="{5F231060-5F53-61BD-9633-3E23EB72F852}"/>
+                <a16:creationId xmlns:a16="http://schemas.microsoft.com/office/drawing/2014/main" id="{B780F723-D0DF-ABDE-9002-51C4FCF454B2}"/>
               </a:ext>
             </a:extLst>
           </p:cNvPr>
@@ -2634,7 +2634,7 @@
           <a:bodyPr/>
           <a:lstStyle/>
           <a:p>
-            <a:fld id="{BDF5E7EA-258D-41FC-A4A8-903EE98C1CB2}" type="datetimeFigureOut">
+            <a:fld id="{0FB6FC17-8C7C-449E-BD4A-07BA56EDFDF1}" type="datetimeFigureOut">
               <a:rPr kumimoji="1" lang="ja-JP" altLang="en-US" smtClean="0"/>
               <a:t>2026/7/30</a:t>
             </a:fld>
@@ -2647,7 +2647,7 @@
           <p:cNvPr id="6" name="フッター プレースホルダー 5">
             <a:extLst>
               <a:ext uri="{FF2B5EF4-FFF2-40B4-BE49-F238E27FC236}">
-                <a16:creationId xmlns:a16="http://schemas.microsoft.com/office/drawing/2014/main" id="{AEF8A996-348A-2B42-D29F-D414295976A5}"/>
+                <a16:creationId xmlns:a16="http://schemas.microsoft.com/office/drawing/2014/main" id="{AE5F1950-1FC4-C9FD-F058-0C2C2843B3DD}"/>
               </a:ext>
             </a:extLst>
           </p:cNvPr>
@@ -2672,7 +2672,7 @@
           <p:cNvPr id="7" name="スライド番号プレースホルダー 6">
             <a:extLst>
               <a:ext uri="{FF2B5EF4-FFF2-40B4-BE49-F238E27FC236}">
-                <a16:creationId xmlns:a16="http://schemas.microsoft.com/office/drawing/2014/main" id="{D3EE920B-9107-DD35-0A2C-C0C2EC7FBF9E}"/>
+                <a16:creationId xmlns:a16="http://schemas.microsoft.com/office/drawing/2014/main" id="{B738CB89-5693-E822-334A-D8AC7360CD5A}"/>
               </a:ext>
             </a:extLst>
           </p:cNvPr>
@@ -2688,7 +2688,7 @@
           <a:bodyPr/>
           <a:lstStyle/>
           <a:p>
-            <a:fld id="{824EB639-B339-47AD-877E-C14FD39140E0}" type="slidenum">
+            <a:fld id="{31E1BAFF-54C0-4196-8E78-B9FB4140FEC4}" type="slidenum">
               <a:rPr kumimoji="1" lang="ja-JP" altLang="en-US" smtClean="0"/>
               <a:t>‹#›</a:t>
             </a:fld>
@@ -2699,7 +2699,7 @@
     </p:spTree>
     <p:extLst>
       <p:ext uri="{BB962C8B-B14F-4D97-AF65-F5344CB8AC3E}">
-        <p14:creationId xmlns:p14="http://schemas.microsoft.com/office/powerpoint/2010/main" val="1584581153"/>
+        <p14:creationId xmlns:p14="http://schemas.microsoft.com/office/powerpoint/2010/main" val="66084577"/>
       </p:ext>
     </p:extLst>
   </p:cSld>
@@ -2731,7 +2731,7 @@
           <p:cNvPr id="2" name="タイトル 1">
             <a:extLst>
               <a:ext uri="{FF2B5EF4-FFF2-40B4-BE49-F238E27FC236}">
-                <a16:creationId xmlns:a16="http://schemas.microsoft.com/office/drawing/2014/main" id="{349CF9E7-BB72-091C-945A-0980B9C6125E}"/>
+                <a16:creationId xmlns:a16="http://schemas.microsoft.com/office/drawing/2014/main" id="{D78BF66E-FEBA-7B91-02B8-7BFE33B6B8AE}"/>
               </a:ext>
             </a:extLst>
           </p:cNvPr>
@@ -2768,7 +2768,7 @@
           <p:cNvPr id="3" name="図プレースホルダー 2">
             <a:extLst>
               <a:ext uri="{FF2B5EF4-FFF2-40B4-BE49-F238E27FC236}">
-                <a16:creationId xmlns:a16="http://schemas.microsoft.com/office/drawing/2014/main" id="{F722B419-4973-C9F2-5AFA-4F9E54302B6A}"/>
+                <a16:creationId xmlns:a16="http://schemas.microsoft.com/office/drawing/2014/main" id="{D137EC79-164A-CE19-4F02-48538368DD6F}"/>
               </a:ext>
             </a:extLst>
           </p:cNvPr>
@@ -2835,7 +2835,7 @@
           <p:cNvPr id="4" name="テキスト プレースホルダー 3">
             <a:extLst>
               <a:ext uri="{FF2B5EF4-FFF2-40B4-BE49-F238E27FC236}">
-                <a16:creationId xmlns:a16="http://schemas.microsoft.com/office/drawing/2014/main" id="{33BD2F9D-1F45-2211-A09A-7E8A29E113AD}"/>
+                <a16:creationId xmlns:a16="http://schemas.microsoft.com/office/drawing/2014/main" id="{819AACA8-ED71-5561-1924-3F527C0B5F64}"/>
               </a:ext>
             </a:extLst>
           </p:cNvPr>
@@ -2906,7 +2906,7 @@
           <p:cNvPr id="5" name="日付プレースホルダー 4">
             <a:extLst>
               <a:ext uri="{FF2B5EF4-FFF2-40B4-BE49-F238E27FC236}">
-                <a16:creationId xmlns:a16="http://schemas.microsoft.com/office/drawing/2014/main" id="{0A2C69C5-C67F-E1D9-7FD8-AB50BBAC0B15}"/>
+                <a16:creationId xmlns:a16="http://schemas.microsoft.com/office/drawing/2014/main" id="{9FE41EAF-2A9E-AE8C-DA0F-D1F4A458154D}"/>
               </a:ext>
             </a:extLst>
           </p:cNvPr>
@@ -2922,7 +2922,7 @@
           <a:bodyPr/>
           <a:lstStyle/>
           <a:p>
-            <a:fld id="{BDF5E7EA-258D-41FC-A4A8-903EE98C1CB2}" type="datetimeFigureOut">
+            <a:fld id="{0FB6FC17-8C7C-449E-BD4A-07BA56EDFDF1}" type="datetimeFigureOut">
               <a:rPr kumimoji="1" lang="ja-JP" altLang="en-US" smtClean="0"/>
               <a:t>2026/7/30</a:t>
             </a:fld>
@@ -2935,7 +2935,7 @@
           <p:cNvPr id="6" name="フッター プレースホルダー 5">
             <a:extLst>
               <a:ext uri="{FF2B5EF4-FFF2-40B4-BE49-F238E27FC236}">
-                <a16:creationId xmlns:a16="http://schemas.microsoft.com/office/drawing/2014/main" id="{D74D6EE8-494D-3C1B-7784-5515CE75DFCB}"/>
+                <a16:creationId xmlns:a16="http://schemas.microsoft.com/office/drawing/2014/main" id="{A38E7714-39F9-7926-A706-2A2642A1A245}"/>
               </a:ext>
             </a:extLst>
           </p:cNvPr>
@@ -2960,7 +2960,7 @@
           <p:cNvPr id="7" name="スライド番号プレースホルダー 6">
             <a:extLst>
               <a:ext uri="{FF2B5EF4-FFF2-40B4-BE49-F238E27FC236}">
-                <a16:creationId xmlns:a16="http://schemas.microsoft.com/office/drawing/2014/main" id="{724A117A-34C1-4103-093B-BDA7A2BC31B3}"/>
+                <a16:creationId xmlns:a16="http://schemas.microsoft.com/office/drawing/2014/main" id="{2DF6D5D1-7257-8475-8FDE-5BA6197ED457}"/>
               </a:ext>
             </a:extLst>
           </p:cNvPr>
@@ -2976,7 +2976,7 @@
           <a:bodyPr/>
           <a:lstStyle/>
           <a:p>
-            <a:fld id="{824EB639-B339-47AD-877E-C14FD39140E0}" type="slidenum">
+            <a:fld id="{31E1BAFF-54C0-4196-8E78-B9FB4140FEC4}" type="slidenum">
               <a:rPr kumimoji="1" lang="ja-JP" altLang="en-US" smtClean="0"/>
               <a:t>‹#›</a:t>
             </a:fld>
@@ -2987,7 +2987,7 @@
     </p:spTree>
     <p:extLst>
       <p:ext uri="{BB962C8B-B14F-4D97-AF65-F5344CB8AC3E}">
-        <p14:creationId xmlns:p14="http://schemas.microsoft.com/office/powerpoint/2010/main" val="3334279163"/>
+        <p14:creationId xmlns:p14="http://schemas.microsoft.com/office/powerpoint/2010/main" val="4145960416"/>
       </p:ext>
     </p:extLst>
   </p:cSld>
@@ -3024,7 +3024,7 @@
           <p:cNvPr id="2" name="タイトル プレースホルダー 1">
             <a:extLst>
               <a:ext uri="{FF2B5EF4-FFF2-40B4-BE49-F238E27FC236}">
-                <a16:creationId xmlns:a16="http://schemas.microsoft.com/office/drawing/2014/main" id="{312A67B0-6F8E-2885-781E-0831061205E9}"/>
+                <a16:creationId xmlns:a16="http://schemas.microsoft.com/office/drawing/2014/main" id="{2003440D-F0C5-1481-FE3B-69488FE9570F}"/>
               </a:ext>
             </a:extLst>
           </p:cNvPr>
@@ -3062,7 +3062,7 @@
           <p:cNvPr id="3" name="テキスト プレースホルダー 2">
             <a:extLst>
               <a:ext uri="{FF2B5EF4-FFF2-40B4-BE49-F238E27FC236}">
-                <a16:creationId xmlns:a16="http://schemas.microsoft.com/office/drawing/2014/main" id="{212EB2B4-4D65-E562-7B64-5DDD38D74ED2}"/>
+                <a16:creationId xmlns:a16="http://schemas.microsoft.com/office/drawing/2014/main" id="{D057FA0D-C8D8-3E9C-2336-3CE83E10C6BE}"/>
               </a:ext>
             </a:extLst>
           </p:cNvPr>
@@ -3161,7 +3161,7 @@
           <p:cNvPr id="4" name="日付プレースホルダー 3">
             <a:extLst>
               <a:ext uri="{FF2B5EF4-FFF2-40B4-BE49-F238E27FC236}">
-                <a16:creationId xmlns:a16="http://schemas.microsoft.com/office/drawing/2014/main" id="{9B6ADFF6-25C3-F3FA-0B31-F20B0D06AD15}"/>
+                <a16:creationId xmlns:a16="http://schemas.microsoft.com/office/drawing/2014/main" id="{F9625E57-963E-9CA1-8F2C-9B621958DFC1}"/>
               </a:ext>
             </a:extLst>
           </p:cNvPr>
@@ -3195,7 +3195,7 @@
             </a:lvl1pPr>
           </a:lstStyle>
           <a:p>
-            <a:fld id="{BDF5E7EA-258D-41FC-A4A8-903EE98C1CB2}" type="datetimeFigureOut">
+            <a:fld id="{0FB6FC17-8C7C-449E-BD4A-07BA56EDFDF1}" type="datetimeFigureOut">
               <a:rPr kumimoji="1" lang="ja-JP" altLang="en-US" smtClean="0"/>
               <a:t>2026/7/30</a:t>
             </a:fld>
@@ -3208,7 +3208,7 @@
           <p:cNvPr id="5" name="フッター プレースホルダー 4">
             <a:extLst>
               <a:ext uri="{FF2B5EF4-FFF2-40B4-BE49-F238E27FC236}">
-                <a16:creationId xmlns:a16="http://schemas.microsoft.com/office/drawing/2014/main" id="{94E68EFB-BE9D-2848-0111-E49F12E418C7}"/>
+                <a16:creationId xmlns:a16="http://schemas.microsoft.com/office/drawing/2014/main" id="{A49C1AA4-5F5E-8CCF-A147-58C3319B6278}"/>
               </a:ext>
             </a:extLst>
           </p:cNvPr>
@@ -3251,7 +3251,7 @@
           <p:cNvPr id="6" name="スライド番号プレースホルダー 5">
             <a:extLst>
               <a:ext uri="{FF2B5EF4-FFF2-40B4-BE49-F238E27FC236}">
-                <a16:creationId xmlns:a16="http://schemas.microsoft.com/office/drawing/2014/main" id="{4DD6040E-63D5-007B-D79F-D31AD92564CC}"/>
+                <a16:creationId xmlns:a16="http://schemas.microsoft.com/office/drawing/2014/main" id="{C86279D0-0052-41EB-76D6-509A0334E4D9}"/>
               </a:ext>
             </a:extLst>
           </p:cNvPr>
@@ -3285,7 +3285,7 @@
             </a:lvl1pPr>
           </a:lstStyle>
           <a:p>
-            <a:fld id="{824EB639-B339-47AD-877E-C14FD39140E0}" type="slidenum">
+            <a:fld id="{31E1BAFF-54C0-4196-8E78-B9FB4140FEC4}" type="slidenum">
               <a:rPr kumimoji="1" lang="ja-JP" altLang="en-US" smtClean="0"/>
               <a:t>‹#›</a:t>
             </a:fld>
@@ -3296,7 +3296,7 @@
     </p:spTree>
     <p:extLst>
       <p:ext uri="{BB962C8B-B14F-4D97-AF65-F5344CB8AC3E}">
-        <p14:creationId xmlns:p14="http://schemas.microsoft.com/office/powerpoint/2010/main" val="1250143571"/>
+        <p14:creationId xmlns:p14="http://schemas.microsoft.com/office/powerpoint/2010/main" val="3971503400"/>
       </p:ext>
     </p:extLst>
   </p:cSld>
@@ -3619,7 +3619,7 @@
           <p:cNvPr id="2" name="テキスト ボックス 1">
             <a:extLst>
               <a:ext uri="{FF2B5EF4-FFF2-40B4-BE49-F238E27FC236}">
-                <a16:creationId xmlns:a16="http://schemas.microsoft.com/office/drawing/2014/main" id="{C2EED15C-011F-C091-8F2D-FBF40E6D6923}"/>
+                <a16:creationId xmlns:a16="http://schemas.microsoft.com/office/drawing/2014/main" id="{2D067CE1-033E-7F7C-C740-B56B646243D8}"/>
               </a:ext>
             </a:extLst>
           </p:cNvPr>
@@ -3665,7 +3665,7 @@
           <p:cNvPr id="3" name="テキスト ボックス 2">
             <a:extLst>
               <a:ext uri="{FF2B5EF4-FFF2-40B4-BE49-F238E27FC236}">
-                <a16:creationId xmlns:a16="http://schemas.microsoft.com/office/drawing/2014/main" id="{D5754CA8-4745-BE84-5D51-A00E969B69C2}"/>
+                <a16:creationId xmlns:a16="http://schemas.microsoft.com/office/drawing/2014/main" id="{C5F2FF6D-37E4-D7D7-FFA3-BB2A1110FEFC}"/>
               </a:ext>
             </a:extLst>
           </p:cNvPr>
@@ -3695,14 +3695,17 @@
                 </a:solidFill>
                 <a:latin typeface="Arial" panose="020B0604020202020204" pitchFamily="34" charset="0"/>
               </a:rPr>
-              <a:t>map-search TECH EXPLANATION</a:t>
-            </a:r>
-            <a:endParaRPr kumimoji="1" lang="ja-JP" altLang="en-US" sz="3400" b="1">
-              <a:solidFill>
-                <a:srgbClr val="111111"/>
-              </a:solidFill>
-              <a:latin typeface="Arial" panose="020B0604020202020204" pitchFamily="34" charset="0"/>
-            </a:endParaRPr>
+              <a:t>Map Search</a:t>
+            </a:r>
+            <a:r>
+              <a:rPr kumimoji="1" lang="ja-JP" altLang="en-US" sz="3400" b="1">
+                <a:solidFill>
+                  <a:srgbClr val="111111"/>
+                </a:solidFill>
+                <a:latin typeface="Arial" panose="020B0604020202020204" pitchFamily="34" charset="0"/>
+              </a:rPr>
+              <a:t>の技術解説</a:t>
+            </a:r>
           </a:p>
         </p:txBody>
       </p:sp>
@@ -3711,7 +3714,7 @@
           <p:cNvPr id="4" name="テキスト ボックス 3">
             <a:extLst>
               <a:ext uri="{FF2B5EF4-FFF2-40B4-BE49-F238E27FC236}">
-                <a16:creationId xmlns:a16="http://schemas.microsoft.com/office/drawing/2014/main" id="{106B2070-FE98-A9A7-235A-570AD98C5BDD}"/>
+                <a16:creationId xmlns:a16="http://schemas.microsoft.com/office/drawing/2014/main" id="{82A18D1D-DE17-38D5-D7E0-3842072E5230}"/>
               </a:ext>
             </a:extLst>
           </p:cNvPr>
@@ -3735,20 +3738,14 @@
           <a:lstStyle/>
           <a:p>
             <a:r>
-              <a:rPr kumimoji="1" lang="en-US" altLang="ja-JP" sz="2000">
+              <a:rPr kumimoji="1" lang="ja-JP" altLang="en-US" sz="2000">
                 <a:solidFill>
                   <a:srgbClr val="333333"/>
                 </a:solidFill>
                 <a:latin typeface="Arial" panose="020B0604020202020204" pitchFamily="34" charset="0"/>
               </a:rPr>
-              <a:t>Architecture, implementation and commit history in 75 seconds</a:t>
-            </a:r>
-            <a:endParaRPr kumimoji="1" lang="ja-JP" altLang="en-US" sz="2000">
-              <a:solidFill>
-                <a:srgbClr val="333333"/>
-              </a:solidFill>
-              <a:latin typeface="Arial" panose="020B0604020202020204" pitchFamily="34" charset="0"/>
-            </a:endParaRPr>
+              <a:t>設計・実装・コミットから学ぶ短時間プレビュー</a:t>
+            </a:r>
           </a:p>
         </p:txBody>
       </p:sp>
@@ -3757,7 +3754,7 @@
           <p:cNvPr id="5" name="テキスト ボックス 4">
             <a:extLst>
               <a:ext uri="{FF2B5EF4-FFF2-40B4-BE49-F238E27FC236}">
-                <a16:creationId xmlns:a16="http://schemas.microsoft.com/office/drawing/2014/main" id="{1CBCC003-27DA-C1CF-DD84-0FAD3AE4B310}"/>
+                <a16:creationId xmlns:a16="http://schemas.microsoft.com/office/drawing/2014/main" id="{11FE48FC-6CB3-29E2-B46B-3ED7620AE3E9}"/>
               </a:ext>
             </a:extLst>
           </p:cNvPr>
@@ -3804,7 +3801,7 @@
             <a:hlinkClick r:id="" action="ppaction://media"/>
             <a:extLst>
               <a:ext uri="{FF2B5EF4-FFF2-40B4-BE49-F238E27FC236}">
-                <a16:creationId xmlns:a16="http://schemas.microsoft.com/office/drawing/2014/main" id="{2B8B2D6C-C403-6654-3055-53E67DEFF146}"/>
+                <a16:creationId xmlns:a16="http://schemas.microsoft.com/office/drawing/2014/main" id="{11E9E798-5D24-7347-CCC4-F841A1EFC824}"/>
               </a:ext>
             </a:extLst>
           </p:cNvPr>
@@ -3839,7 +3836,7 @@
     </p:spTree>
     <p:extLst>
       <p:ext uri="{BB962C8B-B14F-4D97-AF65-F5344CB8AC3E}">
-        <p14:creationId xmlns:p14="http://schemas.microsoft.com/office/powerpoint/2010/main" val="1378063757"/>
+        <p14:creationId xmlns:p14="http://schemas.microsoft.com/office/powerpoint/2010/main" val="371486715"/>
       </p:ext>
     </p:extLst>
   </p:cSld>
@@ -3963,7 +3960,7 @@
           <p:cNvPr id="2" name="テキスト ボックス 1">
             <a:extLst>
               <a:ext uri="{FF2B5EF4-FFF2-40B4-BE49-F238E27FC236}">
-                <a16:creationId xmlns:a16="http://schemas.microsoft.com/office/drawing/2014/main" id="{6F63357C-7D13-6E34-2741-7A8A7A434B06}"/>
+                <a16:creationId xmlns:a16="http://schemas.microsoft.com/office/drawing/2014/main" id="{CF514C80-2594-DA32-E435-CB8807E1AEF1}"/>
               </a:ext>
             </a:extLst>
           </p:cNvPr>
@@ -4009,7 +4006,7 @@
           <p:cNvPr id="3" name="テキスト ボックス 2">
             <a:extLst>
               <a:ext uri="{FF2B5EF4-FFF2-40B4-BE49-F238E27FC236}">
-                <a16:creationId xmlns:a16="http://schemas.microsoft.com/office/drawing/2014/main" id="{C6C801E1-0609-5449-6CE4-31DA3D9D197D}"/>
+                <a16:creationId xmlns:a16="http://schemas.microsoft.com/office/drawing/2014/main" id="{E9C76881-B115-6951-ED23-3A4A100D1C84}"/>
               </a:ext>
             </a:extLst>
           </p:cNvPr>
@@ -4033,20 +4030,14 @@
           <a:lstStyle/>
           <a:p>
             <a:r>
-              <a:rPr kumimoji="1" lang="en-US" altLang="ja-JP" sz="3400" b="1">
+              <a:rPr kumimoji="1" lang="ja-JP" altLang="en-US" sz="3400" b="1">
                 <a:solidFill>
                   <a:srgbClr val="111111"/>
                 </a:solidFill>
                 <a:latin typeface="Arial" panose="020B0604020202020204" pitchFamily="34" charset="0"/>
               </a:rPr>
-              <a:t>WHAT DOES IT SOLVE?</a:t>
-            </a:r>
-            <a:endParaRPr kumimoji="1" lang="ja-JP" altLang="en-US" sz="3400" b="1">
-              <a:solidFill>
-                <a:srgbClr val="111111"/>
-              </a:solidFill>
-              <a:latin typeface="Arial" panose="020B0604020202020204" pitchFamily="34" charset="0"/>
-            </a:endParaRPr>
+              <a:t>このプロジェクトは何を解決する？</a:t>
+            </a:r>
           </a:p>
         </p:txBody>
       </p:sp>
@@ -4055,7 +4046,7 @@
           <p:cNvPr id="4" name="テキスト ボックス 3">
             <a:extLst>
               <a:ext uri="{FF2B5EF4-FFF2-40B4-BE49-F238E27FC236}">
-                <a16:creationId xmlns:a16="http://schemas.microsoft.com/office/drawing/2014/main" id="{C3A75AC2-EF49-9F83-1C6E-E311B69EC19A}"/>
+                <a16:creationId xmlns:a16="http://schemas.microsoft.com/office/drawing/2014/main" id="{575CC233-192B-AD4D-5C47-FA0627C7202C}"/>
               </a:ext>
             </a:extLst>
           </p:cNvPr>
@@ -4104,7 +4095,7 @@
           <p:cNvPr id="5" name="テキスト ボックス 4">
             <a:extLst>
               <a:ext uri="{FF2B5EF4-FFF2-40B4-BE49-F238E27FC236}">
-                <a16:creationId xmlns:a16="http://schemas.microsoft.com/office/drawing/2014/main" id="{62E6B39D-4E18-F60B-5F51-A85E92929848}"/>
+                <a16:creationId xmlns:a16="http://schemas.microsoft.com/office/drawing/2014/main" id="{331013EF-5327-8C29-E971-4E6BBB0A6CD2}"/>
               </a:ext>
             </a:extLst>
           </p:cNvPr>
@@ -4151,7 +4142,7 @@
             <a:hlinkClick r:id="" action="ppaction://media"/>
             <a:extLst>
               <a:ext uri="{FF2B5EF4-FFF2-40B4-BE49-F238E27FC236}">
-                <a16:creationId xmlns:a16="http://schemas.microsoft.com/office/drawing/2014/main" id="{2034CED1-F64E-96EC-F455-38A43124299A}"/>
+                <a16:creationId xmlns:a16="http://schemas.microsoft.com/office/drawing/2014/main" id="{9B562D02-3E48-3428-A647-9836A1D9F574}"/>
               </a:ext>
             </a:extLst>
           </p:cNvPr>
@@ -4186,7 +4177,7 @@
     </p:spTree>
     <p:extLst>
       <p:ext uri="{BB962C8B-B14F-4D97-AF65-F5344CB8AC3E}">
-        <p14:creationId xmlns:p14="http://schemas.microsoft.com/office/powerpoint/2010/main" val="109052552"/>
+        <p14:creationId xmlns:p14="http://schemas.microsoft.com/office/powerpoint/2010/main" val="4069291697"/>
       </p:ext>
     </p:extLst>
   </p:cSld>
@@ -4310,7 +4301,7 @@
           <p:cNvPr id="2" name="テキスト ボックス 1">
             <a:extLst>
               <a:ext uri="{FF2B5EF4-FFF2-40B4-BE49-F238E27FC236}">
-                <a16:creationId xmlns:a16="http://schemas.microsoft.com/office/drawing/2014/main" id="{7140BCEE-A654-2614-B026-FDDF6FEAF8CC}"/>
+                <a16:creationId xmlns:a16="http://schemas.microsoft.com/office/drawing/2014/main" id="{BEC102E3-50E6-AF05-87FB-95524904C6D4}"/>
               </a:ext>
             </a:extLst>
           </p:cNvPr>
@@ -4356,7 +4347,7 @@
           <p:cNvPr id="3" name="テキスト ボックス 2">
             <a:extLst>
               <a:ext uri="{FF2B5EF4-FFF2-40B4-BE49-F238E27FC236}">
-                <a16:creationId xmlns:a16="http://schemas.microsoft.com/office/drawing/2014/main" id="{DE029121-A5E1-D4C6-865B-EF59C693CBB0}"/>
+                <a16:creationId xmlns:a16="http://schemas.microsoft.com/office/drawing/2014/main" id="{665423ED-D488-8CA6-C873-FB9D46CF51DF}"/>
               </a:ext>
             </a:extLst>
           </p:cNvPr>
@@ -4380,20 +4371,14 @@
           <a:lstStyle/>
           <a:p>
             <a:r>
-              <a:rPr kumimoji="1" lang="en-US" altLang="ja-JP" sz="3400" b="1">
+              <a:rPr kumimoji="1" lang="ja-JP" altLang="en-US" sz="3400" b="1">
                 <a:solidFill>
                   <a:srgbClr val="111111"/>
                 </a:solidFill>
                 <a:latin typeface="Arial" panose="020B0604020202020204" pitchFamily="34" charset="0"/>
               </a:rPr>
-              <a:t>TECH STACK</a:t>
-            </a:r>
-            <a:endParaRPr kumimoji="1" lang="ja-JP" altLang="en-US" sz="3400" b="1">
-              <a:solidFill>
-                <a:srgbClr val="111111"/>
-              </a:solidFill>
-              <a:latin typeface="Arial" panose="020B0604020202020204" pitchFamily="34" charset="0"/>
-            </a:endParaRPr>
+              <a:t>技術スタック</a:t>
+            </a:r>
           </a:p>
         </p:txBody>
       </p:sp>
@@ -4402,7 +4387,7 @@
           <p:cNvPr id="4" name="テキスト ボックス 3">
             <a:extLst>
               <a:ext uri="{FF2B5EF4-FFF2-40B4-BE49-F238E27FC236}">
-                <a16:creationId xmlns:a16="http://schemas.microsoft.com/office/drawing/2014/main" id="{9B6D3A7F-9D5E-8C21-114F-2823EF831A5F}"/>
+                <a16:creationId xmlns:a16="http://schemas.microsoft.com/office/drawing/2014/main" id="{CBA5E9A6-E1EF-13F3-9C38-8FB1B740AE51}"/>
               </a:ext>
             </a:extLst>
           </p:cNvPr>
@@ -4412,7 +4397,7 @@
         <p:spPr>
           <a:xfrm>
             <a:off x="533400" y="3429000"/>
-            <a:ext cx="10795000" cy="400110"/>
+            <a:ext cx="10795000" cy="707886"/>
           </a:xfrm>
           <a:prstGeom prst="rect">
             <a:avLst/>
@@ -4426,13 +4411,22 @@
           <a:lstStyle/>
           <a:p>
             <a:r>
+              <a:rPr kumimoji="1" lang="ja-JP" altLang="en-US" sz="2000">
+                <a:solidFill>
+                  <a:srgbClr val="333333"/>
+                </a:solidFill>
+                <a:latin typeface="Arial" panose="020B0604020202020204" pitchFamily="34" charset="0"/>
+              </a:rPr>
+              <a:t>主要技術：</a:t>
+            </a:r>
+            <a:r>
               <a:rPr kumimoji="1" lang="en-US" altLang="ja-JP" sz="2000">
                 <a:solidFill>
                   <a:srgbClr val="333333"/>
                 </a:solidFill>
                 <a:latin typeface="Arial" panose="020B0604020202020204" pitchFamily="34" charset="0"/>
               </a:rPr>
-              <a:t>Primary technologies: HTML</a:t>
+              <a:t>HTML</a:t>
             </a:r>
             <a:r>
               <a:rPr kumimoji="1" lang="ja-JP" altLang="en-US" sz="2000">
@@ -4468,14 +4462,18 @@
                 </a:solidFill>
                 <a:latin typeface="Arial" panose="020B0604020202020204" pitchFamily="34" charset="0"/>
               </a:rPr>
-              <a:t>CSS</a:t>
-            </a:r>
-            <a:endParaRPr kumimoji="1" lang="ja-JP" altLang="en-US" sz="2000">
-              <a:solidFill>
-                <a:srgbClr val="333333"/>
-              </a:solidFill>
-              <a:latin typeface="Arial" panose="020B0604020202020204" pitchFamily="34" charset="0"/>
-            </a:endParaRPr>
+              <a:t>CSS
+</a:t>
+            </a:r>
+            <a:r>
+              <a:rPr kumimoji="1" lang="ja-JP" altLang="en-US" sz="2000">
+                <a:solidFill>
+                  <a:srgbClr val="333333"/>
+                </a:solidFill>
+                <a:latin typeface="Arial" panose="020B0604020202020204" pitchFamily="34" charset="0"/>
+              </a:rPr>
+              <a:t>役割を分け、保守しやすい構成を目指しています。</a:t>
+            </a:r>
           </a:p>
         </p:txBody>
       </p:sp>
@@ -4484,7 +4482,7 @@
           <p:cNvPr id="5" name="テキスト ボックス 4">
             <a:extLst>
               <a:ext uri="{FF2B5EF4-FFF2-40B4-BE49-F238E27FC236}">
-                <a16:creationId xmlns:a16="http://schemas.microsoft.com/office/drawing/2014/main" id="{6F2494EF-BEC5-9B48-AF76-0ED9434E24B9}"/>
+                <a16:creationId xmlns:a16="http://schemas.microsoft.com/office/drawing/2014/main" id="{E9FE40CC-F12D-656A-60EE-EBC7D6CD1372}"/>
               </a:ext>
             </a:extLst>
           </p:cNvPr>
@@ -4531,7 +4529,7 @@
             <a:hlinkClick r:id="" action="ppaction://media"/>
             <a:extLst>
               <a:ext uri="{FF2B5EF4-FFF2-40B4-BE49-F238E27FC236}">
-                <a16:creationId xmlns:a16="http://schemas.microsoft.com/office/drawing/2014/main" id="{53A706D5-EA3E-0185-73B6-401A82A6BE68}"/>
+                <a16:creationId xmlns:a16="http://schemas.microsoft.com/office/drawing/2014/main" id="{462DB8B4-4264-E48C-CA3D-E9B8C644AB6D}"/>
               </a:ext>
             </a:extLst>
           </p:cNvPr>
@@ -4566,7 +4564,7 @@
     </p:spTree>
     <p:extLst>
       <p:ext uri="{BB962C8B-B14F-4D97-AF65-F5344CB8AC3E}">
-        <p14:creationId xmlns:p14="http://schemas.microsoft.com/office/powerpoint/2010/main" val="3030984657"/>
+        <p14:creationId xmlns:p14="http://schemas.microsoft.com/office/powerpoint/2010/main" val="4040726715"/>
       </p:ext>
     </p:extLst>
   </p:cSld>
@@ -4690,7 +4688,7 @@
           <p:cNvPr id="2" name="テキスト ボックス 1">
             <a:extLst>
               <a:ext uri="{FF2B5EF4-FFF2-40B4-BE49-F238E27FC236}">
-                <a16:creationId xmlns:a16="http://schemas.microsoft.com/office/drawing/2014/main" id="{6459201A-7E0D-4D31-D1B6-8783298D98C2}"/>
+                <a16:creationId xmlns:a16="http://schemas.microsoft.com/office/drawing/2014/main" id="{45267A2B-1578-D5DC-7E0A-05B6BA21D75B}"/>
               </a:ext>
             </a:extLst>
           </p:cNvPr>
@@ -4736,7 +4734,7 @@
           <p:cNvPr id="3" name="テキスト ボックス 2">
             <a:extLst>
               <a:ext uri="{FF2B5EF4-FFF2-40B4-BE49-F238E27FC236}">
-                <a16:creationId xmlns:a16="http://schemas.microsoft.com/office/drawing/2014/main" id="{CF58FF8B-9FC1-870C-C009-F8FFE02592B5}"/>
+                <a16:creationId xmlns:a16="http://schemas.microsoft.com/office/drawing/2014/main" id="{E4559CC4-7DC9-D298-CA18-46C3526B1051}"/>
               </a:ext>
             </a:extLst>
           </p:cNvPr>
@@ -4760,20 +4758,14 @@
           <a:lstStyle/>
           <a:p>
             <a:r>
-              <a:rPr kumimoji="1" lang="en-US" altLang="ja-JP" sz="3400" b="1">
+              <a:rPr kumimoji="1" lang="ja-JP" altLang="en-US" sz="3400" b="1">
                 <a:solidFill>
                   <a:srgbClr val="111111"/>
                 </a:solidFill>
                 <a:latin typeface="Arial" panose="020B0604020202020204" pitchFamily="34" charset="0"/>
               </a:rPr>
-              <a:t>REPOSITORY HIGHLIGHTS</a:t>
-            </a:r>
-            <a:endParaRPr kumimoji="1" lang="ja-JP" altLang="en-US" sz="3400" b="1">
-              <a:solidFill>
-                <a:srgbClr val="111111"/>
-              </a:solidFill>
-              <a:latin typeface="Arial" panose="020B0604020202020204" pitchFamily="34" charset="0"/>
-            </a:endParaRPr>
+              <a:t>リポジトリの読みどころ</a:t>
+            </a:r>
           </a:p>
         </p:txBody>
       </p:sp>
@@ -4782,7 +4774,7 @@
           <p:cNvPr id="4" name="テキスト ボックス 3">
             <a:extLst>
               <a:ext uri="{FF2B5EF4-FFF2-40B4-BE49-F238E27FC236}">
-                <a16:creationId xmlns:a16="http://schemas.microsoft.com/office/drawing/2014/main" id="{224D55B0-671D-C752-6D72-B918506FA6D8}"/>
+                <a16:creationId xmlns:a16="http://schemas.microsoft.com/office/drawing/2014/main" id="{2371C4C0-0887-8354-7D1A-62896DB2C548}"/>
               </a:ext>
             </a:extLst>
           </p:cNvPr>
@@ -4792,7 +4784,7 @@
         <p:spPr>
           <a:xfrm>
             <a:off x="533400" y="3429000"/>
-            <a:ext cx="10795000" cy="400110"/>
+            <a:ext cx="10795000" cy="707886"/>
           </a:xfrm>
           <a:prstGeom prst="rect">
             <a:avLst/>
@@ -4806,13 +4798,77 @@
           <a:lstStyle/>
           <a:p>
             <a:r>
+              <a:rPr kumimoji="1" lang="ja-JP" altLang="en-US" sz="2000">
+                <a:solidFill>
+                  <a:srgbClr val="333333"/>
+                </a:solidFill>
+                <a:latin typeface="Arial" panose="020B0604020202020204" pitchFamily="34" charset="0"/>
+              </a:rPr>
+              <a:t>公開コード、</a:t>
+            </a:r>
+            <a:r>
               <a:rPr kumimoji="1" lang="en-US" altLang="ja-JP" sz="2000">
                 <a:solidFill>
                   <a:srgbClr val="333333"/>
                 </a:solidFill>
                 <a:latin typeface="Arial" panose="020B0604020202020204" pitchFamily="34" charset="0"/>
               </a:rPr>
-              <a:t>Public source code, README and commit history reveal the design decisions.</a:t>
+              <a:t>README</a:t>
+            </a:r>
+            <a:r>
+              <a:rPr kumimoji="1" lang="ja-JP" altLang="en-US" sz="2000">
+                <a:solidFill>
+                  <a:srgbClr val="333333"/>
+                </a:solidFill>
+                <a:latin typeface="Arial" panose="020B0604020202020204" pitchFamily="34" charset="0"/>
+              </a:rPr>
+              <a:t>、コミット履歴から設計判断を確認できます。
+主なファイル：</a:t>
+            </a:r>
+            <a:r>
+              <a:rPr kumimoji="1" lang="en-US" altLang="ja-JP" sz="2000">
+                <a:solidFill>
+                  <a:srgbClr val="333333"/>
+                </a:solidFill>
+                <a:latin typeface="Arial" panose="020B0604020202020204" pitchFamily="34" charset="0"/>
+              </a:rPr>
+              <a:t>AFFILIATE_SETUP.md</a:t>
+            </a:r>
+            <a:r>
+              <a:rPr kumimoji="1" lang="ja-JP" altLang="en-US" sz="2000">
+                <a:solidFill>
+                  <a:srgbClr val="333333"/>
+                </a:solidFill>
+                <a:latin typeface="Arial" panose="020B0604020202020204" pitchFamily="34" charset="0"/>
+              </a:rPr>
+              <a:t>、</a:t>
+            </a:r>
+            <a:r>
+              <a:rPr kumimoji="1" lang="en-US" altLang="ja-JP" sz="2000">
+                <a:solidFill>
+                  <a:srgbClr val="333333"/>
+                </a:solidFill>
+                <a:latin typeface="Arial" panose="020B0604020202020204" pitchFamily="34" charset="0"/>
+              </a:rPr>
+              <a:t>HOTPEPPER_API.md</a:t>
+            </a:r>
+            <a:r>
+              <a:rPr kumimoji="1" lang="ja-JP" altLang="en-US" sz="2000">
+                <a:solidFill>
+                  <a:srgbClr val="333333"/>
+                </a:solidFill>
+                <a:latin typeface="Arial" panose="020B0604020202020204" pitchFamily="34" charset="0"/>
+              </a:rPr>
+              <a:t>、</a:t>
+            </a:r>
+            <a:r>
+              <a:rPr kumimoji="1" lang="en-US" altLang="ja-JP" sz="2000">
+                <a:solidFill>
+                  <a:srgbClr val="333333"/>
+                </a:solidFill>
+                <a:latin typeface="Arial" panose="020B0604020202020204" pitchFamily="34" charset="0"/>
+              </a:rPr>
+              <a:t>aichi</a:t>
             </a:r>
             <a:endParaRPr kumimoji="1" lang="ja-JP" altLang="en-US" sz="2000">
               <a:solidFill>
@@ -4828,7 +4884,7 @@
           <p:cNvPr id="5" name="テキスト ボックス 4">
             <a:extLst>
               <a:ext uri="{FF2B5EF4-FFF2-40B4-BE49-F238E27FC236}">
-                <a16:creationId xmlns:a16="http://schemas.microsoft.com/office/drawing/2014/main" id="{586AA39A-6765-4E96-2DD6-BBB6A532CECF}"/>
+                <a16:creationId xmlns:a16="http://schemas.microsoft.com/office/drawing/2014/main" id="{2BF8970E-3448-C5E7-DCC3-C4998EC517FA}"/>
               </a:ext>
             </a:extLst>
           </p:cNvPr>
@@ -4875,7 +4931,7 @@
             <a:hlinkClick r:id="" action="ppaction://media"/>
             <a:extLst>
               <a:ext uri="{FF2B5EF4-FFF2-40B4-BE49-F238E27FC236}">
-                <a16:creationId xmlns:a16="http://schemas.microsoft.com/office/drawing/2014/main" id="{9D69F191-5347-C443-066F-2567ABEDD69D}"/>
+                <a16:creationId xmlns:a16="http://schemas.microsoft.com/office/drawing/2014/main" id="{DEE34F56-7FFA-04D2-77B8-2DA6F91A38EF}"/>
               </a:ext>
             </a:extLst>
           </p:cNvPr>
@@ -4910,7 +4966,7 @@
     </p:spTree>
     <p:extLst>
       <p:ext uri="{BB962C8B-B14F-4D97-AF65-F5344CB8AC3E}">
-        <p14:creationId xmlns:p14="http://schemas.microsoft.com/office/powerpoint/2010/main" val="3449731430"/>
+        <p14:creationId xmlns:p14="http://schemas.microsoft.com/office/powerpoint/2010/main" val="2597704332"/>
       </p:ext>
     </p:extLst>
   </p:cSld>
@@ -5034,7 +5090,7 @@
           <p:cNvPr id="2" name="テキスト ボックス 1">
             <a:extLst>
               <a:ext uri="{FF2B5EF4-FFF2-40B4-BE49-F238E27FC236}">
-                <a16:creationId xmlns:a16="http://schemas.microsoft.com/office/drawing/2014/main" id="{503476BC-9A82-78EC-F394-B9C680A25422}"/>
+                <a16:creationId xmlns:a16="http://schemas.microsoft.com/office/drawing/2014/main" id="{516D08F4-A56C-157B-6100-DD7587576E57}"/>
               </a:ext>
             </a:extLst>
           </p:cNvPr>
@@ -5080,7 +5136,7 @@
           <p:cNvPr id="3" name="テキスト ボックス 2">
             <a:extLst>
               <a:ext uri="{FF2B5EF4-FFF2-40B4-BE49-F238E27FC236}">
-                <a16:creationId xmlns:a16="http://schemas.microsoft.com/office/drawing/2014/main" id="{3F4CBA7B-2132-672E-1D16-D6543E7881BD}"/>
+                <a16:creationId xmlns:a16="http://schemas.microsoft.com/office/drawing/2014/main" id="{2F43AA5F-B712-FD5A-2E08-9A0E13D70528}"/>
               </a:ext>
             </a:extLst>
           </p:cNvPr>
@@ -5104,20 +5160,14 @@
           <a:lstStyle/>
           <a:p>
             <a:r>
-              <a:rPr kumimoji="1" lang="en-US" altLang="ja-JP" sz="3400" b="1">
+              <a:rPr kumimoji="1" lang="ja-JP" altLang="en-US" sz="3400" b="1">
                 <a:solidFill>
                   <a:srgbClr val="111111"/>
                 </a:solidFill>
                 <a:latin typeface="Arial" panose="020B0604020202020204" pitchFamily="34" charset="0"/>
               </a:rPr>
-              <a:t>ITERATIVE IMPROVEMENT</a:t>
-            </a:r>
-            <a:endParaRPr kumimoji="1" lang="ja-JP" altLang="en-US" sz="3400" b="1">
-              <a:solidFill>
-                <a:srgbClr val="111111"/>
-              </a:solidFill>
-              <a:latin typeface="Arial" panose="020B0604020202020204" pitchFamily="34" charset="0"/>
-            </a:endParaRPr>
+              <a:t>コミットから分かる改善</a:t>
+            </a:r>
           </a:p>
         </p:txBody>
       </p:sp>
@@ -5126,7 +5176,7 @@
           <p:cNvPr id="4" name="テキスト ボックス 3">
             <a:extLst>
               <a:ext uri="{FF2B5EF4-FFF2-40B4-BE49-F238E27FC236}">
-                <a16:creationId xmlns:a16="http://schemas.microsoft.com/office/drawing/2014/main" id="{C8D468E4-C27F-3FCC-2A7C-B32E49C77D97}"/>
+                <a16:creationId xmlns:a16="http://schemas.microsoft.com/office/drawing/2014/main" id="{428D3463-50AB-7D20-7A87-4051329684F2}"/>
               </a:ext>
             </a:extLst>
           </p:cNvPr>
@@ -5156,7 +5206,7 @@
                 </a:solidFill>
                 <a:latin typeface="Arial" panose="020B0604020202020204" pitchFamily="34" charset="0"/>
               </a:rPr>
-              <a:t>Small commits continuously improve features, quality and release readiness.</a:t>
+              <a:t>Configure root as Vercel output directory for static site</a:t>
             </a:r>
             <a:endParaRPr kumimoji="1" lang="ja-JP" altLang="en-US" sz="2000">
               <a:solidFill>
@@ -5172,7 +5222,7 @@
           <p:cNvPr id="5" name="テキスト ボックス 4">
             <a:extLst>
               <a:ext uri="{FF2B5EF4-FFF2-40B4-BE49-F238E27FC236}">
-                <a16:creationId xmlns:a16="http://schemas.microsoft.com/office/drawing/2014/main" id="{802C1D1B-36E4-305B-6421-55533BD11CDF}"/>
+                <a16:creationId xmlns:a16="http://schemas.microsoft.com/office/drawing/2014/main" id="{7913481B-D6A3-5CA4-2BE4-31A9EB21BE59}"/>
               </a:ext>
             </a:extLst>
           </p:cNvPr>
@@ -5219,7 +5269,7 @@
             <a:hlinkClick r:id="" action="ppaction://media"/>
             <a:extLst>
               <a:ext uri="{FF2B5EF4-FFF2-40B4-BE49-F238E27FC236}">
-                <a16:creationId xmlns:a16="http://schemas.microsoft.com/office/drawing/2014/main" id="{072B6258-C2C2-E3FC-ADE3-1002A82C78B1}"/>
+                <a16:creationId xmlns:a16="http://schemas.microsoft.com/office/drawing/2014/main" id="{250E091C-F0A6-70BD-9A5A-F17FE0F0BCA5}"/>
               </a:ext>
             </a:extLst>
           </p:cNvPr>
@@ -5254,7 +5304,7 @@
     </p:spTree>
     <p:extLst>
       <p:ext uri="{BB962C8B-B14F-4D97-AF65-F5344CB8AC3E}">
-        <p14:creationId xmlns:p14="http://schemas.microsoft.com/office/powerpoint/2010/main" val="883883608"/>
+        <p14:creationId xmlns:p14="http://schemas.microsoft.com/office/powerpoint/2010/main" val="63906436"/>
       </p:ext>
     </p:extLst>
   </p:cSld>
@@ -5378,7 +5428,7 @@
           <p:cNvPr id="2" name="テキスト ボックス 1">
             <a:extLst>
               <a:ext uri="{FF2B5EF4-FFF2-40B4-BE49-F238E27FC236}">
-                <a16:creationId xmlns:a16="http://schemas.microsoft.com/office/drawing/2014/main" id="{E39EFB04-7F71-81BF-81C1-1112B54FBD5F}"/>
+                <a16:creationId xmlns:a16="http://schemas.microsoft.com/office/drawing/2014/main" id="{23D16E94-3BCC-1DB6-14B4-F48B2722D610}"/>
               </a:ext>
             </a:extLst>
           </p:cNvPr>
@@ -5424,7 +5474,7 @@
           <p:cNvPr id="3" name="テキスト ボックス 2">
             <a:extLst>
               <a:ext uri="{FF2B5EF4-FFF2-40B4-BE49-F238E27FC236}">
-                <a16:creationId xmlns:a16="http://schemas.microsoft.com/office/drawing/2014/main" id="{17DA456C-81A2-2815-121B-6415C849EBF9}"/>
+                <a16:creationId xmlns:a16="http://schemas.microsoft.com/office/drawing/2014/main" id="{29745096-178E-E18D-09D7-2EE9F2AF5590}"/>
               </a:ext>
             </a:extLst>
           </p:cNvPr>
@@ -5448,20 +5498,14 @@
           <a:lstStyle/>
           <a:p>
             <a:r>
-              <a:rPr kumimoji="1" lang="en-US" altLang="ja-JP" sz="3400" b="1">
+              <a:rPr kumimoji="1" lang="ja-JP" altLang="en-US" sz="3400" b="1">
                 <a:solidFill>
                   <a:srgbClr val="111111"/>
                 </a:solidFill>
                 <a:latin typeface="Arial" panose="020B0604020202020204" pitchFamily="34" charset="0"/>
               </a:rPr>
-              <a:t>READ THE FULL ARTICLE</a:t>
-            </a:r>
-            <a:endParaRPr kumimoji="1" lang="ja-JP" altLang="en-US" sz="3400" b="1">
-              <a:solidFill>
-                <a:srgbClr val="111111"/>
-              </a:solidFill>
-              <a:latin typeface="Arial" panose="020B0604020202020204" pitchFamily="34" charset="0"/>
-            </a:endParaRPr>
+              <a:t>詳しくは積み上げログへ</a:t>
+            </a:r>
           </a:p>
         </p:txBody>
       </p:sp>
@@ -5470,7 +5514,7 @@
           <p:cNvPr id="4" name="テキスト ボックス 3">
             <a:extLst>
               <a:ext uri="{FF2B5EF4-FFF2-40B4-BE49-F238E27FC236}">
-                <a16:creationId xmlns:a16="http://schemas.microsoft.com/office/drawing/2014/main" id="{E6821B67-5DB2-FDE0-4193-418A3A724D08}"/>
+                <a16:creationId xmlns:a16="http://schemas.microsoft.com/office/drawing/2014/main" id="{D1C051C8-4FE7-8901-786B-A08F981E06AF}"/>
               </a:ext>
             </a:extLst>
           </p:cNvPr>
@@ -5494,14 +5538,32 @@
           <a:lstStyle/>
           <a:p>
             <a:r>
-              <a:rPr kumimoji="1" lang="sv-SE" altLang="ja-JP" sz="2000">
+              <a:rPr kumimoji="1" lang="zh-TW" altLang="en-US" sz="2000">
+                <a:solidFill>
+                  <a:srgbClr val="333333"/>
+                </a:solidFill>
+                <a:latin typeface="Arial" panose="020B0604020202020204" pitchFamily="34" charset="0"/>
+              </a:rPr>
+              <a:t>記事： </a:t>
+            </a:r>
+            <a:r>
+              <a:rPr kumimoji="1" lang="en-US" altLang="zh-TW" sz="2000">
                 <a:solidFill>
                   <a:srgbClr val="333333"/>
                 </a:solidFill>
                 <a:latin typeface="Arial" panose="020B0604020202020204" pitchFamily="34" charset="0"/>
               </a:rPr>
               <a:t>https://syunnjack.dev/articles/map-search
-TSUMIAGE LOG</a:t>
+</a:t>
+            </a:r>
+            <a:r>
+              <a:rPr kumimoji="1" lang="zh-TW" altLang="en-US" sz="2000">
+                <a:solidFill>
+                  <a:srgbClr val="333333"/>
+                </a:solidFill>
+                <a:latin typeface="Arial" panose="020B0604020202020204" pitchFamily="34" charset="0"/>
+              </a:rPr>
+              <a:t>学び、作り、振り返る開発記録。</a:t>
             </a:r>
             <a:endParaRPr kumimoji="1" lang="ja-JP" altLang="en-US" sz="2000">
               <a:solidFill>
@@ -5517,7 +5579,7 @@
           <p:cNvPr id="5" name="テキスト ボックス 4">
             <a:extLst>
               <a:ext uri="{FF2B5EF4-FFF2-40B4-BE49-F238E27FC236}">
-                <a16:creationId xmlns:a16="http://schemas.microsoft.com/office/drawing/2014/main" id="{CC8B11A9-AB4B-242C-582E-8EAD500C9E29}"/>
+                <a16:creationId xmlns:a16="http://schemas.microsoft.com/office/drawing/2014/main" id="{0A325FFE-3AFA-E492-C60A-35183AFA778D}"/>
               </a:ext>
             </a:extLst>
           </p:cNvPr>
@@ -5564,7 +5626,7 @@
             <a:hlinkClick r:id="" action="ppaction://media"/>
             <a:extLst>
               <a:ext uri="{FF2B5EF4-FFF2-40B4-BE49-F238E27FC236}">
-                <a16:creationId xmlns:a16="http://schemas.microsoft.com/office/drawing/2014/main" id="{9FB5A96B-EB6D-F4BA-AED9-B1FAD59B46B5}"/>
+                <a16:creationId xmlns:a16="http://schemas.microsoft.com/office/drawing/2014/main" id="{AD49BA08-F2BF-5A88-9D2F-5FC82270B2E7}"/>
               </a:ext>
             </a:extLst>
           </p:cNvPr>
@@ -5599,7 +5661,7 @@
     </p:spTree>
     <p:extLst>
       <p:ext uri="{BB962C8B-B14F-4D97-AF65-F5344CB8AC3E}">
-        <p14:creationId xmlns:p14="http://schemas.microsoft.com/office/powerpoint/2010/main" val="3161558907"/>
+        <p14:creationId xmlns:p14="http://schemas.microsoft.com/office/powerpoint/2010/main" val="4066784266"/>
       </p:ext>
     </p:extLst>
   </p:cSld>

--- a/public/videos/repositories/map-search/map-search-tech-preview.pptx
+++ b/public/videos/repositories/map-search/map-search-tech-preview.pptx
@@ -134,7 +134,7 @@
           <p:cNvPr id="2" name="タイトル 1">
             <a:extLst>
               <a:ext uri="{FF2B5EF4-FFF2-40B4-BE49-F238E27FC236}">
-                <a16:creationId xmlns:a16="http://schemas.microsoft.com/office/drawing/2014/main" id="{2C98A4DB-9FC8-6E2B-D8B5-E8E5D010BDDE}"/>
+                <a16:creationId xmlns:a16="http://schemas.microsoft.com/office/drawing/2014/main" id="{7F8C5CC4-3887-7D28-DA79-AC9BA4087CAD}"/>
               </a:ext>
             </a:extLst>
           </p:cNvPr>
@@ -171,7 +171,7 @@
           <p:cNvPr id="3" name="字幕 2">
             <a:extLst>
               <a:ext uri="{FF2B5EF4-FFF2-40B4-BE49-F238E27FC236}">
-                <a16:creationId xmlns:a16="http://schemas.microsoft.com/office/drawing/2014/main" id="{AD554193-081C-2222-8029-4B4EDCDDC1A1}"/>
+                <a16:creationId xmlns:a16="http://schemas.microsoft.com/office/drawing/2014/main" id="{9127F92D-15E1-DD11-AA02-EF68D8997781}"/>
               </a:ext>
             </a:extLst>
           </p:cNvPr>
@@ -241,7 +241,7 @@
           <p:cNvPr id="4" name="日付プレースホルダー 3">
             <a:extLst>
               <a:ext uri="{FF2B5EF4-FFF2-40B4-BE49-F238E27FC236}">
-                <a16:creationId xmlns:a16="http://schemas.microsoft.com/office/drawing/2014/main" id="{9A8BFD3D-1A9A-9BAD-5DE2-E38DFA0B1FE3}"/>
+                <a16:creationId xmlns:a16="http://schemas.microsoft.com/office/drawing/2014/main" id="{B2469F9F-E324-99D3-9B81-3398E3996041}"/>
               </a:ext>
             </a:extLst>
           </p:cNvPr>
@@ -257,7 +257,7 @@
           <a:bodyPr/>
           <a:lstStyle/>
           <a:p>
-            <a:fld id="{0FB6FC17-8C7C-449E-BD4A-07BA56EDFDF1}" type="datetimeFigureOut">
+            <a:fld id="{17BF61B0-F343-4BBA-A03A-C6F8776FCB6F}" type="datetimeFigureOut">
               <a:rPr kumimoji="1" lang="ja-JP" altLang="en-US" smtClean="0"/>
               <a:t>2026/7/30</a:t>
             </a:fld>
@@ -270,7 +270,7 @@
           <p:cNvPr id="5" name="フッター プレースホルダー 4">
             <a:extLst>
               <a:ext uri="{FF2B5EF4-FFF2-40B4-BE49-F238E27FC236}">
-                <a16:creationId xmlns:a16="http://schemas.microsoft.com/office/drawing/2014/main" id="{71883D39-8267-36FD-BFC4-085C88631638}"/>
+                <a16:creationId xmlns:a16="http://schemas.microsoft.com/office/drawing/2014/main" id="{A409D7EC-A5D1-BAC6-6F35-A1AAC92DB09E}"/>
               </a:ext>
             </a:extLst>
           </p:cNvPr>
@@ -295,7 +295,7 @@
           <p:cNvPr id="6" name="スライド番号プレースホルダー 5">
             <a:extLst>
               <a:ext uri="{FF2B5EF4-FFF2-40B4-BE49-F238E27FC236}">
-                <a16:creationId xmlns:a16="http://schemas.microsoft.com/office/drawing/2014/main" id="{E8101836-F2E8-BE4F-33FE-A9EDC3CBC7D4}"/>
+                <a16:creationId xmlns:a16="http://schemas.microsoft.com/office/drawing/2014/main" id="{D8120F12-8EB3-FF87-2E18-B6C5E35D9374}"/>
               </a:ext>
             </a:extLst>
           </p:cNvPr>
@@ -311,7 +311,7 @@
           <a:bodyPr/>
           <a:lstStyle/>
           <a:p>
-            <a:fld id="{31E1BAFF-54C0-4196-8E78-B9FB4140FEC4}" type="slidenum">
+            <a:fld id="{1B529B5E-12CF-47B9-B0A9-F8D9F69288FD}" type="slidenum">
               <a:rPr kumimoji="1" lang="ja-JP" altLang="en-US" smtClean="0"/>
               <a:t>‹#›</a:t>
             </a:fld>
@@ -322,7 +322,7 @@
     </p:spTree>
     <p:extLst>
       <p:ext uri="{BB962C8B-B14F-4D97-AF65-F5344CB8AC3E}">
-        <p14:creationId xmlns:p14="http://schemas.microsoft.com/office/powerpoint/2010/main" val="14060338"/>
+        <p14:creationId xmlns:p14="http://schemas.microsoft.com/office/powerpoint/2010/main" val="209806371"/>
       </p:ext>
     </p:extLst>
   </p:cSld>
@@ -354,7 +354,7 @@
           <p:cNvPr id="2" name="タイトル 1">
             <a:extLst>
               <a:ext uri="{FF2B5EF4-FFF2-40B4-BE49-F238E27FC236}">
-                <a16:creationId xmlns:a16="http://schemas.microsoft.com/office/drawing/2014/main" id="{A7427BAB-06A4-2883-093A-A443D61B64C7}"/>
+                <a16:creationId xmlns:a16="http://schemas.microsoft.com/office/drawing/2014/main" id="{B95F8F12-DDDB-1AAC-893F-CABD8182D023}"/>
               </a:ext>
             </a:extLst>
           </p:cNvPr>
@@ -382,7 +382,7 @@
           <p:cNvPr id="3" name="縦書きテキスト プレースホルダー 2">
             <a:extLst>
               <a:ext uri="{FF2B5EF4-FFF2-40B4-BE49-F238E27FC236}">
-                <a16:creationId xmlns:a16="http://schemas.microsoft.com/office/drawing/2014/main" id="{EFD941D3-F752-7ED8-F17F-D87999B4B1B4}"/>
+                <a16:creationId xmlns:a16="http://schemas.microsoft.com/office/drawing/2014/main" id="{D7F4015D-AB53-7E53-7B52-81A94685C538}"/>
               </a:ext>
             </a:extLst>
           </p:cNvPr>
@@ -471,7 +471,7 @@
           <p:cNvPr id="4" name="日付プレースホルダー 3">
             <a:extLst>
               <a:ext uri="{FF2B5EF4-FFF2-40B4-BE49-F238E27FC236}">
-                <a16:creationId xmlns:a16="http://schemas.microsoft.com/office/drawing/2014/main" id="{94E32997-5F6E-E921-5689-875DA58DA20F}"/>
+                <a16:creationId xmlns:a16="http://schemas.microsoft.com/office/drawing/2014/main" id="{FFF7F5E2-E5AC-E74F-3C86-06D794F6057F}"/>
               </a:ext>
             </a:extLst>
           </p:cNvPr>
@@ -487,7 +487,7 @@
           <a:bodyPr/>
           <a:lstStyle/>
           <a:p>
-            <a:fld id="{0FB6FC17-8C7C-449E-BD4A-07BA56EDFDF1}" type="datetimeFigureOut">
+            <a:fld id="{17BF61B0-F343-4BBA-A03A-C6F8776FCB6F}" type="datetimeFigureOut">
               <a:rPr kumimoji="1" lang="ja-JP" altLang="en-US" smtClean="0"/>
               <a:t>2026/7/30</a:t>
             </a:fld>
@@ -500,7 +500,7 @@
           <p:cNvPr id="5" name="フッター プレースホルダー 4">
             <a:extLst>
               <a:ext uri="{FF2B5EF4-FFF2-40B4-BE49-F238E27FC236}">
-                <a16:creationId xmlns:a16="http://schemas.microsoft.com/office/drawing/2014/main" id="{80A53950-6518-F058-2002-66C3DCDD23FA}"/>
+                <a16:creationId xmlns:a16="http://schemas.microsoft.com/office/drawing/2014/main" id="{9D223BC0-EBBA-E083-1E62-99EB21270318}"/>
               </a:ext>
             </a:extLst>
           </p:cNvPr>
@@ -525,7 +525,7 @@
           <p:cNvPr id="6" name="スライド番号プレースホルダー 5">
             <a:extLst>
               <a:ext uri="{FF2B5EF4-FFF2-40B4-BE49-F238E27FC236}">
-                <a16:creationId xmlns:a16="http://schemas.microsoft.com/office/drawing/2014/main" id="{D57F8CFD-7C21-554F-210C-0B23E671E62A}"/>
+                <a16:creationId xmlns:a16="http://schemas.microsoft.com/office/drawing/2014/main" id="{8A90C61C-9843-4A6D-3F70-755F12D51788}"/>
               </a:ext>
             </a:extLst>
           </p:cNvPr>
@@ -541,7 +541,7 @@
           <a:bodyPr/>
           <a:lstStyle/>
           <a:p>
-            <a:fld id="{31E1BAFF-54C0-4196-8E78-B9FB4140FEC4}" type="slidenum">
+            <a:fld id="{1B529B5E-12CF-47B9-B0A9-F8D9F69288FD}" type="slidenum">
               <a:rPr kumimoji="1" lang="ja-JP" altLang="en-US" smtClean="0"/>
               <a:t>‹#›</a:t>
             </a:fld>
@@ -552,7 +552,7 @@
     </p:spTree>
     <p:extLst>
       <p:ext uri="{BB962C8B-B14F-4D97-AF65-F5344CB8AC3E}">
-        <p14:creationId xmlns:p14="http://schemas.microsoft.com/office/powerpoint/2010/main" val="993310997"/>
+        <p14:creationId xmlns:p14="http://schemas.microsoft.com/office/powerpoint/2010/main" val="1507455635"/>
       </p:ext>
     </p:extLst>
   </p:cSld>
@@ -584,7 +584,7 @@
           <p:cNvPr id="2" name="縦書きタイトル 1">
             <a:extLst>
               <a:ext uri="{FF2B5EF4-FFF2-40B4-BE49-F238E27FC236}">
-                <a16:creationId xmlns:a16="http://schemas.microsoft.com/office/drawing/2014/main" id="{E3AAB538-C1B4-EE1E-7BB6-E57974362D69}"/>
+                <a16:creationId xmlns:a16="http://schemas.microsoft.com/office/drawing/2014/main" id="{5B1A260B-76CE-CE37-85BC-67FAAF86C5F4}"/>
               </a:ext>
             </a:extLst>
           </p:cNvPr>
@@ -617,7 +617,7 @@
           <p:cNvPr id="3" name="縦書きテキスト プレースホルダー 2">
             <a:extLst>
               <a:ext uri="{FF2B5EF4-FFF2-40B4-BE49-F238E27FC236}">
-                <a16:creationId xmlns:a16="http://schemas.microsoft.com/office/drawing/2014/main" id="{4B07F67D-0A52-4D5D-30B9-1C4627DCFB90}"/>
+                <a16:creationId xmlns:a16="http://schemas.microsoft.com/office/drawing/2014/main" id="{B78A7F91-1A1A-0B9F-C8C0-E573BA8601FD}"/>
               </a:ext>
             </a:extLst>
           </p:cNvPr>
@@ -711,7 +711,7 @@
           <p:cNvPr id="4" name="日付プレースホルダー 3">
             <a:extLst>
               <a:ext uri="{FF2B5EF4-FFF2-40B4-BE49-F238E27FC236}">
-                <a16:creationId xmlns:a16="http://schemas.microsoft.com/office/drawing/2014/main" id="{4BABE35A-CF35-8886-01B3-6754C658CB1F}"/>
+                <a16:creationId xmlns:a16="http://schemas.microsoft.com/office/drawing/2014/main" id="{B99C8B4B-9BEF-6974-7921-25411DA8683E}"/>
               </a:ext>
             </a:extLst>
           </p:cNvPr>
@@ -727,7 +727,7 @@
           <a:bodyPr/>
           <a:lstStyle/>
           <a:p>
-            <a:fld id="{0FB6FC17-8C7C-449E-BD4A-07BA56EDFDF1}" type="datetimeFigureOut">
+            <a:fld id="{17BF61B0-F343-4BBA-A03A-C6F8776FCB6F}" type="datetimeFigureOut">
               <a:rPr kumimoji="1" lang="ja-JP" altLang="en-US" smtClean="0"/>
               <a:t>2026/7/30</a:t>
             </a:fld>
@@ -740,7 +740,7 @@
           <p:cNvPr id="5" name="フッター プレースホルダー 4">
             <a:extLst>
               <a:ext uri="{FF2B5EF4-FFF2-40B4-BE49-F238E27FC236}">
-                <a16:creationId xmlns:a16="http://schemas.microsoft.com/office/drawing/2014/main" id="{071E24E2-3D4F-2399-2A62-B09055D2D02B}"/>
+                <a16:creationId xmlns:a16="http://schemas.microsoft.com/office/drawing/2014/main" id="{B31818A0-7C5B-6106-57F4-1585369445E3}"/>
               </a:ext>
             </a:extLst>
           </p:cNvPr>
@@ -765,7 +765,7 @@
           <p:cNvPr id="6" name="スライド番号プレースホルダー 5">
             <a:extLst>
               <a:ext uri="{FF2B5EF4-FFF2-40B4-BE49-F238E27FC236}">
-                <a16:creationId xmlns:a16="http://schemas.microsoft.com/office/drawing/2014/main" id="{BAC1AA08-027A-E61D-BFD9-510A438EEEFC}"/>
+                <a16:creationId xmlns:a16="http://schemas.microsoft.com/office/drawing/2014/main" id="{432344F4-DC4A-36BE-3621-A00693D443D0}"/>
               </a:ext>
             </a:extLst>
           </p:cNvPr>
@@ -781,7 +781,7 @@
           <a:bodyPr/>
           <a:lstStyle/>
           <a:p>
-            <a:fld id="{31E1BAFF-54C0-4196-8E78-B9FB4140FEC4}" type="slidenum">
+            <a:fld id="{1B529B5E-12CF-47B9-B0A9-F8D9F69288FD}" type="slidenum">
               <a:rPr kumimoji="1" lang="ja-JP" altLang="en-US" smtClean="0"/>
               <a:t>‹#›</a:t>
             </a:fld>
@@ -792,7 +792,7 @@
     </p:spTree>
     <p:extLst>
       <p:ext uri="{BB962C8B-B14F-4D97-AF65-F5344CB8AC3E}">
-        <p14:creationId xmlns:p14="http://schemas.microsoft.com/office/powerpoint/2010/main" val="3012361332"/>
+        <p14:creationId xmlns:p14="http://schemas.microsoft.com/office/powerpoint/2010/main" val="162884458"/>
       </p:ext>
     </p:extLst>
   </p:cSld>
@@ -824,7 +824,7 @@
           <p:cNvPr id="2" name="タイトル 1">
             <a:extLst>
               <a:ext uri="{FF2B5EF4-FFF2-40B4-BE49-F238E27FC236}">
-                <a16:creationId xmlns:a16="http://schemas.microsoft.com/office/drawing/2014/main" id="{01617CDD-E2CF-DE2F-A0FB-FEE35B6E134B}"/>
+                <a16:creationId xmlns:a16="http://schemas.microsoft.com/office/drawing/2014/main" id="{43F4B305-8122-52A3-C03E-579BA757379F}"/>
               </a:ext>
             </a:extLst>
           </p:cNvPr>
@@ -852,7 +852,7 @@
           <p:cNvPr id="3" name="コンテンツ プレースホルダー 2">
             <a:extLst>
               <a:ext uri="{FF2B5EF4-FFF2-40B4-BE49-F238E27FC236}">
-                <a16:creationId xmlns:a16="http://schemas.microsoft.com/office/drawing/2014/main" id="{2C6B3C75-A4D1-EC48-18C0-AD1D2825B8B8}"/>
+                <a16:creationId xmlns:a16="http://schemas.microsoft.com/office/drawing/2014/main" id="{8992671B-4D6B-A730-A859-754330C864DC}"/>
               </a:ext>
             </a:extLst>
           </p:cNvPr>
@@ -941,7 +941,7 @@
           <p:cNvPr id="4" name="日付プレースホルダー 3">
             <a:extLst>
               <a:ext uri="{FF2B5EF4-FFF2-40B4-BE49-F238E27FC236}">
-                <a16:creationId xmlns:a16="http://schemas.microsoft.com/office/drawing/2014/main" id="{47EAD4F8-3445-68A6-7EA9-D5EB0E316961}"/>
+                <a16:creationId xmlns:a16="http://schemas.microsoft.com/office/drawing/2014/main" id="{41070851-2311-65CB-84F0-0B973C235C5A}"/>
               </a:ext>
             </a:extLst>
           </p:cNvPr>
@@ -957,7 +957,7 @@
           <a:bodyPr/>
           <a:lstStyle/>
           <a:p>
-            <a:fld id="{0FB6FC17-8C7C-449E-BD4A-07BA56EDFDF1}" type="datetimeFigureOut">
+            <a:fld id="{17BF61B0-F343-4BBA-A03A-C6F8776FCB6F}" type="datetimeFigureOut">
               <a:rPr kumimoji="1" lang="ja-JP" altLang="en-US" smtClean="0"/>
               <a:t>2026/7/30</a:t>
             </a:fld>
@@ -970,7 +970,7 @@
           <p:cNvPr id="5" name="フッター プレースホルダー 4">
             <a:extLst>
               <a:ext uri="{FF2B5EF4-FFF2-40B4-BE49-F238E27FC236}">
-                <a16:creationId xmlns:a16="http://schemas.microsoft.com/office/drawing/2014/main" id="{85E93415-E8EC-D1A2-6731-BFA82023B55F}"/>
+                <a16:creationId xmlns:a16="http://schemas.microsoft.com/office/drawing/2014/main" id="{E2E537DD-3CDE-67F4-B7A4-CDF8D8DD4A76}"/>
               </a:ext>
             </a:extLst>
           </p:cNvPr>
@@ -995,7 +995,7 @@
           <p:cNvPr id="6" name="スライド番号プレースホルダー 5">
             <a:extLst>
               <a:ext uri="{FF2B5EF4-FFF2-40B4-BE49-F238E27FC236}">
-                <a16:creationId xmlns:a16="http://schemas.microsoft.com/office/drawing/2014/main" id="{4D34E732-0CD0-00EF-DCE5-FA2D267E6BA9}"/>
+                <a16:creationId xmlns:a16="http://schemas.microsoft.com/office/drawing/2014/main" id="{22099774-1D86-CB66-8FD3-63B2852CB9A8}"/>
               </a:ext>
             </a:extLst>
           </p:cNvPr>
@@ -1011,7 +1011,7 @@
           <a:bodyPr/>
           <a:lstStyle/>
           <a:p>
-            <a:fld id="{31E1BAFF-54C0-4196-8E78-B9FB4140FEC4}" type="slidenum">
+            <a:fld id="{1B529B5E-12CF-47B9-B0A9-F8D9F69288FD}" type="slidenum">
               <a:rPr kumimoji="1" lang="ja-JP" altLang="en-US" smtClean="0"/>
               <a:t>‹#›</a:t>
             </a:fld>
@@ -1022,7 +1022,7 @@
     </p:spTree>
     <p:extLst>
       <p:ext uri="{BB962C8B-B14F-4D97-AF65-F5344CB8AC3E}">
-        <p14:creationId xmlns:p14="http://schemas.microsoft.com/office/powerpoint/2010/main" val="1474142434"/>
+        <p14:creationId xmlns:p14="http://schemas.microsoft.com/office/powerpoint/2010/main" val="3098100241"/>
       </p:ext>
     </p:extLst>
   </p:cSld>
@@ -1054,7 +1054,7 @@
           <p:cNvPr id="2" name="タイトル 1">
             <a:extLst>
               <a:ext uri="{FF2B5EF4-FFF2-40B4-BE49-F238E27FC236}">
-                <a16:creationId xmlns:a16="http://schemas.microsoft.com/office/drawing/2014/main" id="{A6811159-325C-4467-E17A-EE758ACB7960}"/>
+                <a16:creationId xmlns:a16="http://schemas.microsoft.com/office/drawing/2014/main" id="{D0B5A85E-9344-BB03-3B6D-B610250A04C4}"/>
               </a:ext>
             </a:extLst>
           </p:cNvPr>
@@ -1091,7 +1091,7 @@
           <p:cNvPr id="3" name="テキスト プレースホルダー 2">
             <a:extLst>
               <a:ext uri="{FF2B5EF4-FFF2-40B4-BE49-F238E27FC236}">
-                <a16:creationId xmlns:a16="http://schemas.microsoft.com/office/drawing/2014/main" id="{9026396E-B55B-DCC1-CDBC-E9C64675119C}"/>
+                <a16:creationId xmlns:a16="http://schemas.microsoft.com/office/drawing/2014/main" id="{F28A68B0-615F-A82A-AC62-D9964A2E06D0}"/>
               </a:ext>
             </a:extLst>
           </p:cNvPr>
@@ -1216,7 +1216,7 @@
           <p:cNvPr id="4" name="日付プレースホルダー 3">
             <a:extLst>
               <a:ext uri="{FF2B5EF4-FFF2-40B4-BE49-F238E27FC236}">
-                <a16:creationId xmlns:a16="http://schemas.microsoft.com/office/drawing/2014/main" id="{7E1EFC76-8FD8-C83D-EBF6-CE91AC567F83}"/>
+                <a16:creationId xmlns:a16="http://schemas.microsoft.com/office/drawing/2014/main" id="{6F9FBA28-D839-0337-C0E1-3636CFEA2BE0}"/>
               </a:ext>
             </a:extLst>
           </p:cNvPr>
@@ -1232,7 +1232,7 @@
           <a:bodyPr/>
           <a:lstStyle/>
           <a:p>
-            <a:fld id="{0FB6FC17-8C7C-449E-BD4A-07BA56EDFDF1}" type="datetimeFigureOut">
+            <a:fld id="{17BF61B0-F343-4BBA-A03A-C6F8776FCB6F}" type="datetimeFigureOut">
               <a:rPr kumimoji="1" lang="ja-JP" altLang="en-US" smtClean="0"/>
               <a:t>2026/7/30</a:t>
             </a:fld>
@@ -1245,7 +1245,7 @@
           <p:cNvPr id="5" name="フッター プレースホルダー 4">
             <a:extLst>
               <a:ext uri="{FF2B5EF4-FFF2-40B4-BE49-F238E27FC236}">
-                <a16:creationId xmlns:a16="http://schemas.microsoft.com/office/drawing/2014/main" id="{C1191FA8-C8D3-09D5-4C83-C9B5A18E3419}"/>
+                <a16:creationId xmlns:a16="http://schemas.microsoft.com/office/drawing/2014/main" id="{74ABC00D-9989-A378-EA7B-B6BD7C5174BF}"/>
               </a:ext>
             </a:extLst>
           </p:cNvPr>
@@ -1270,7 +1270,7 @@
           <p:cNvPr id="6" name="スライド番号プレースホルダー 5">
             <a:extLst>
               <a:ext uri="{FF2B5EF4-FFF2-40B4-BE49-F238E27FC236}">
-                <a16:creationId xmlns:a16="http://schemas.microsoft.com/office/drawing/2014/main" id="{50EC4166-BC65-0263-1191-A8907D8DA249}"/>
+                <a16:creationId xmlns:a16="http://schemas.microsoft.com/office/drawing/2014/main" id="{A886D94C-B094-C0E1-BC41-03CC3014B4E6}"/>
               </a:ext>
             </a:extLst>
           </p:cNvPr>
@@ -1286,7 +1286,7 @@
           <a:bodyPr/>
           <a:lstStyle/>
           <a:p>
-            <a:fld id="{31E1BAFF-54C0-4196-8E78-B9FB4140FEC4}" type="slidenum">
+            <a:fld id="{1B529B5E-12CF-47B9-B0A9-F8D9F69288FD}" type="slidenum">
               <a:rPr kumimoji="1" lang="ja-JP" altLang="en-US" smtClean="0"/>
               <a:t>‹#›</a:t>
             </a:fld>
@@ -1297,7 +1297,7 @@
     </p:spTree>
     <p:extLst>
       <p:ext uri="{BB962C8B-B14F-4D97-AF65-F5344CB8AC3E}">
-        <p14:creationId xmlns:p14="http://schemas.microsoft.com/office/powerpoint/2010/main" val="3244184265"/>
+        <p14:creationId xmlns:p14="http://schemas.microsoft.com/office/powerpoint/2010/main" val="2463228837"/>
       </p:ext>
     </p:extLst>
   </p:cSld>
@@ -1329,7 +1329,7 @@
           <p:cNvPr id="2" name="タイトル 1">
             <a:extLst>
               <a:ext uri="{FF2B5EF4-FFF2-40B4-BE49-F238E27FC236}">
-                <a16:creationId xmlns:a16="http://schemas.microsoft.com/office/drawing/2014/main" id="{04FDD4F6-6D85-7D71-783E-0FA6F8E27922}"/>
+                <a16:creationId xmlns:a16="http://schemas.microsoft.com/office/drawing/2014/main" id="{9B6B73A1-7FC1-8E80-B31E-AF44366B21A3}"/>
               </a:ext>
             </a:extLst>
           </p:cNvPr>
@@ -1357,7 +1357,7 @@
           <p:cNvPr id="3" name="コンテンツ プレースホルダー 2">
             <a:extLst>
               <a:ext uri="{FF2B5EF4-FFF2-40B4-BE49-F238E27FC236}">
-                <a16:creationId xmlns:a16="http://schemas.microsoft.com/office/drawing/2014/main" id="{A61A56C1-2BFE-6334-C404-0CF69D3E08CC}"/>
+                <a16:creationId xmlns:a16="http://schemas.microsoft.com/office/drawing/2014/main" id="{B31732D7-C361-2D90-2829-D5354DF07702}"/>
               </a:ext>
             </a:extLst>
           </p:cNvPr>
@@ -1451,7 +1451,7 @@
           <p:cNvPr id="4" name="コンテンツ プレースホルダー 3">
             <a:extLst>
               <a:ext uri="{FF2B5EF4-FFF2-40B4-BE49-F238E27FC236}">
-                <a16:creationId xmlns:a16="http://schemas.microsoft.com/office/drawing/2014/main" id="{A9D77E3B-E9E4-6C2B-A89C-8E8F6A34AF2A}"/>
+                <a16:creationId xmlns:a16="http://schemas.microsoft.com/office/drawing/2014/main" id="{0C05CAF8-874C-33D0-B62B-DC9495CA4A6A}"/>
               </a:ext>
             </a:extLst>
           </p:cNvPr>
@@ -1545,7 +1545,7 @@
           <p:cNvPr id="5" name="日付プレースホルダー 4">
             <a:extLst>
               <a:ext uri="{FF2B5EF4-FFF2-40B4-BE49-F238E27FC236}">
-                <a16:creationId xmlns:a16="http://schemas.microsoft.com/office/drawing/2014/main" id="{D444E1B7-7B4F-ED39-039D-BCFD955AC1D6}"/>
+                <a16:creationId xmlns:a16="http://schemas.microsoft.com/office/drawing/2014/main" id="{79A411DA-7E20-1A1C-AD70-2F301F6696AF}"/>
               </a:ext>
             </a:extLst>
           </p:cNvPr>
@@ -1561,7 +1561,7 @@
           <a:bodyPr/>
           <a:lstStyle/>
           <a:p>
-            <a:fld id="{0FB6FC17-8C7C-449E-BD4A-07BA56EDFDF1}" type="datetimeFigureOut">
+            <a:fld id="{17BF61B0-F343-4BBA-A03A-C6F8776FCB6F}" type="datetimeFigureOut">
               <a:rPr kumimoji="1" lang="ja-JP" altLang="en-US" smtClean="0"/>
               <a:t>2026/7/30</a:t>
             </a:fld>
@@ -1574,7 +1574,7 @@
           <p:cNvPr id="6" name="フッター プレースホルダー 5">
             <a:extLst>
               <a:ext uri="{FF2B5EF4-FFF2-40B4-BE49-F238E27FC236}">
-                <a16:creationId xmlns:a16="http://schemas.microsoft.com/office/drawing/2014/main" id="{025C2F3A-7EDC-57DC-9B5B-63F88A75955F}"/>
+                <a16:creationId xmlns:a16="http://schemas.microsoft.com/office/drawing/2014/main" id="{1ED60C00-87A1-0DA1-7F8B-257C27537EB6}"/>
               </a:ext>
             </a:extLst>
           </p:cNvPr>
@@ -1599,7 +1599,7 @@
           <p:cNvPr id="7" name="スライド番号プレースホルダー 6">
             <a:extLst>
               <a:ext uri="{FF2B5EF4-FFF2-40B4-BE49-F238E27FC236}">
-                <a16:creationId xmlns:a16="http://schemas.microsoft.com/office/drawing/2014/main" id="{3DD11996-8F76-6FE6-FC00-3E0560385DE5}"/>
+                <a16:creationId xmlns:a16="http://schemas.microsoft.com/office/drawing/2014/main" id="{16677468-621E-7D7A-5892-3E65EF1140C3}"/>
               </a:ext>
             </a:extLst>
           </p:cNvPr>
@@ -1615,7 +1615,7 @@
           <a:bodyPr/>
           <a:lstStyle/>
           <a:p>
-            <a:fld id="{31E1BAFF-54C0-4196-8E78-B9FB4140FEC4}" type="slidenum">
+            <a:fld id="{1B529B5E-12CF-47B9-B0A9-F8D9F69288FD}" type="slidenum">
               <a:rPr kumimoji="1" lang="ja-JP" altLang="en-US" smtClean="0"/>
               <a:t>‹#›</a:t>
             </a:fld>
@@ -1626,7 +1626,7 @@
     </p:spTree>
     <p:extLst>
       <p:ext uri="{BB962C8B-B14F-4D97-AF65-F5344CB8AC3E}">
-        <p14:creationId xmlns:p14="http://schemas.microsoft.com/office/powerpoint/2010/main" val="3485154697"/>
+        <p14:creationId xmlns:p14="http://schemas.microsoft.com/office/powerpoint/2010/main" val="3186035517"/>
       </p:ext>
     </p:extLst>
   </p:cSld>
@@ -1658,7 +1658,7 @@
           <p:cNvPr id="2" name="タイトル 1">
             <a:extLst>
               <a:ext uri="{FF2B5EF4-FFF2-40B4-BE49-F238E27FC236}">
-                <a16:creationId xmlns:a16="http://schemas.microsoft.com/office/drawing/2014/main" id="{38315096-8B18-DF2A-46BA-2CE652BEFAFB}"/>
+                <a16:creationId xmlns:a16="http://schemas.microsoft.com/office/drawing/2014/main" id="{5891EC98-24F4-BFA8-F57E-EDFFDCDF724A}"/>
               </a:ext>
             </a:extLst>
           </p:cNvPr>
@@ -1691,7 +1691,7 @@
           <p:cNvPr id="3" name="テキスト プレースホルダー 2">
             <a:extLst>
               <a:ext uri="{FF2B5EF4-FFF2-40B4-BE49-F238E27FC236}">
-                <a16:creationId xmlns:a16="http://schemas.microsoft.com/office/drawing/2014/main" id="{71FA84BE-DD7C-A976-0614-279384F0FE70}"/>
+                <a16:creationId xmlns:a16="http://schemas.microsoft.com/office/drawing/2014/main" id="{ACAA20AE-2E30-2EAF-3C64-AB3B3573BF9D}"/>
               </a:ext>
             </a:extLst>
           </p:cNvPr>
@@ -1762,7 +1762,7 @@
           <p:cNvPr id="4" name="コンテンツ プレースホルダー 3">
             <a:extLst>
               <a:ext uri="{FF2B5EF4-FFF2-40B4-BE49-F238E27FC236}">
-                <a16:creationId xmlns:a16="http://schemas.microsoft.com/office/drawing/2014/main" id="{84AC6DBB-C2F5-E7A6-6178-EE4753A987AA}"/>
+                <a16:creationId xmlns:a16="http://schemas.microsoft.com/office/drawing/2014/main" id="{5CD37398-F36C-802E-56AA-C43019A8135B}"/>
               </a:ext>
             </a:extLst>
           </p:cNvPr>
@@ -1856,7 +1856,7 @@
           <p:cNvPr id="5" name="テキスト プレースホルダー 4">
             <a:extLst>
               <a:ext uri="{FF2B5EF4-FFF2-40B4-BE49-F238E27FC236}">
-                <a16:creationId xmlns:a16="http://schemas.microsoft.com/office/drawing/2014/main" id="{FFD23623-3CF2-B2CD-8B20-6BAD736E1F7C}"/>
+                <a16:creationId xmlns:a16="http://schemas.microsoft.com/office/drawing/2014/main" id="{AC99D90C-0EDA-30CA-D42E-D46BF47C5F5C}"/>
               </a:ext>
             </a:extLst>
           </p:cNvPr>
@@ -1927,7 +1927,7 @@
           <p:cNvPr id="6" name="コンテンツ プレースホルダー 5">
             <a:extLst>
               <a:ext uri="{FF2B5EF4-FFF2-40B4-BE49-F238E27FC236}">
-                <a16:creationId xmlns:a16="http://schemas.microsoft.com/office/drawing/2014/main" id="{9843ED98-DA34-F739-EB59-1603F8AB4E81}"/>
+                <a16:creationId xmlns:a16="http://schemas.microsoft.com/office/drawing/2014/main" id="{4ECEE7BF-0AC3-806F-B960-ABEA666DABA3}"/>
               </a:ext>
             </a:extLst>
           </p:cNvPr>
@@ -2021,7 +2021,7 @@
           <p:cNvPr id="7" name="日付プレースホルダー 6">
             <a:extLst>
               <a:ext uri="{FF2B5EF4-FFF2-40B4-BE49-F238E27FC236}">
-                <a16:creationId xmlns:a16="http://schemas.microsoft.com/office/drawing/2014/main" id="{2904D40B-FEFB-9C85-4D38-3DFE01FE55D3}"/>
+                <a16:creationId xmlns:a16="http://schemas.microsoft.com/office/drawing/2014/main" id="{014201A8-465A-9CD4-B631-03424639E7BF}"/>
               </a:ext>
             </a:extLst>
           </p:cNvPr>
@@ -2037,7 +2037,7 @@
           <a:bodyPr/>
           <a:lstStyle/>
           <a:p>
-            <a:fld id="{0FB6FC17-8C7C-449E-BD4A-07BA56EDFDF1}" type="datetimeFigureOut">
+            <a:fld id="{17BF61B0-F343-4BBA-A03A-C6F8776FCB6F}" type="datetimeFigureOut">
               <a:rPr kumimoji="1" lang="ja-JP" altLang="en-US" smtClean="0"/>
               <a:t>2026/7/30</a:t>
             </a:fld>
@@ -2050,7 +2050,7 @@
           <p:cNvPr id="8" name="フッター プレースホルダー 7">
             <a:extLst>
               <a:ext uri="{FF2B5EF4-FFF2-40B4-BE49-F238E27FC236}">
-                <a16:creationId xmlns:a16="http://schemas.microsoft.com/office/drawing/2014/main" id="{51627CFE-BDDF-5BCE-DEE9-40276AFCA325}"/>
+                <a16:creationId xmlns:a16="http://schemas.microsoft.com/office/drawing/2014/main" id="{13092C7F-7627-F9B3-941A-96D80B0C81A2}"/>
               </a:ext>
             </a:extLst>
           </p:cNvPr>
@@ -2075,7 +2075,7 @@
           <p:cNvPr id="9" name="スライド番号プレースホルダー 8">
             <a:extLst>
               <a:ext uri="{FF2B5EF4-FFF2-40B4-BE49-F238E27FC236}">
-                <a16:creationId xmlns:a16="http://schemas.microsoft.com/office/drawing/2014/main" id="{C2EB9629-AFCE-3E5B-BF4F-00FE65DF1803}"/>
+                <a16:creationId xmlns:a16="http://schemas.microsoft.com/office/drawing/2014/main" id="{1918477F-F84E-732F-2B08-EE05C468AEB0}"/>
               </a:ext>
             </a:extLst>
           </p:cNvPr>
@@ -2091,7 +2091,7 @@
           <a:bodyPr/>
           <a:lstStyle/>
           <a:p>
-            <a:fld id="{31E1BAFF-54C0-4196-8E78-B9FB4140FEC4}" type="slidenum">
+            <a:fld id="{1B529B5E-12CF-47B9-B0A9-F8D9F69288FD}" type="slidenum">
               <a:rPr kumimoji="1" lang="ja-JP" altLang="en-US" smtClean="0"/>
               <a:t>‹#›</a:t>
             </a:fld>
@@ -2102,7 +2102,7 @@
     </p:spTree>
     <p:extLst>
       <p:ext uri="{BB962C8B-B14F-4D97-AF65-F5344CB8AC3E}">
-        <p14:creationId xmlns:p14="http://schemas.microsoft.com/office/powerpoint/2010/main" val="2162008106"/>
+        <p14:creationId xmlns:p14="http://schemas.microsoft.com/office/powerpoint/2010/main" val="1695757211"/>
       </p:ext>
     </p:extLst>
   </p:cSld>
@@ -2134,7 +2134,7 @@
           <p:cNvPr id="2" name="タイトル 1">
             <a:extLst>
               <a:ext uri="{FF2B5EF4-FFF2-40B4-BE49-F238E27FC236}">
-                <a16:creationId xmlns:a16="http://schemas.microsoft.com/office/drawing/2014/main" id="{06FE0447-F2A8-C069-EF19-D54C76B9631B}"/>
+                <a16:creationId xmlns:a16="http://schemas.microsoft.com/office/drawing/2014/main" id="{033D1421-FB97-EEA9-0C23-246E21DAC682}"/>
               </a:ext>
             </a:extLst>
           </p:cNvPr>
@@ -2162,7 +2162,7 @@
           <p:cNvPr id="3" name="日付プレースホルダー 2">
             <a:extLst>
               <a:ext uri="{FF2B5EF4-FFF2-40B4-BE49-F238E27FC236}">
-                <a16:creationId xmlns:a16="http://schemas.microsoft.com/office/drawing/2014/main" id="{21C1AEF1-7FBA-8BD1-2E4D-6CEEFE796630}"/>
+                <a16:creationId xmlns:a16="http://schemas.microsoft.com/office/drawing/2014/main" id="{5140ACB7-44B9-A642-DB93-E159E117D2A8}"/>
               </a:ext>
             </a:extLst>
           </p:cNvPr>
@@ -2178,7 +2178,7 @@
           <a:bodyPr/>
           <a:lstStyle/>
           <a:p>
-            <a:fld id="{0FB6FC17-8C7C-449E-BD4A-07BA56EDFDF1}" type="datetimeFigureOut">
+            <a:fld id="{17BF61B0-F343-4BBA-A03A-C6F8776FCB6F}" type="datetimeFigureOut">
               <a:rPr kumimoji="1" lang="ja-JP" altLang="en-US" smtClean="0"/>
               <a:t>2026/7/30</a:t>
             </a:fld>
@@ -2191,7 +2191,7 @@
           <p:cNvPr id="4" name="フッター プレースホルダー 3">
             <a:extLst>
               <a:ext uri="{FF2B5EF4-FFF2-40B4-BE49-F238E27FC236}">
-                <a16:creationId xmlns:a16="http://schemas.microsoft.com/office/drawing/2014/main" id="{7F2783EE-31E6-9F56-A5A5-06845D2A3D6D}"/>
+                <a16:creationId xmlns:a16="http://schemas.microsoft.com/office/drawing/2014/main" id="{6AB14D45-CE06-87FA-4030-03E0EA89F51B}"/>
               </a:ext>
             </a:extLst>
           </p:cNvPr>
@@ -2216,7 +2216,7 @@
           <p:cNvPr id="5" name="スライド番号プレースホルダー 4">
             <a:extLst>
               <a:ext uri="{FF2B5EF4-FFF2-40B4-BE49-F238E27FC236}">
-                <a16:creationId xmlns:a16="http://schemas.microsoft.com/office/drawing/2014/main" id="{8F0676B4-8037-EF96-AEA0-6AF74A0C8FDA}"/>
+                <a16:creationId xmlns:a16="http://schemas.microsoft.com/office/drawing/2014/main" id="{4506B9FD-3CBC-355D-0E7E-AAF16A529B10}"/>
               </a:ext>
             </a:extLst>
           </p:cNvPr>
@@ -2232,7 +2232,7 @@
           <a:bodyPr/>
           <a:lstStyle/>
           <a:p>
-            <a:fld id="{31E1BAFF-54C0-4196-8E78-B9FB4140FEC4}" type="slidenum">
+            <a:fld id="{1B529B5E-12CF-47B9-B0A9-F8D9F69288FD}" type="slidenum">
               <a:rPr kumimoji="1" lang="ja-JP" altLang="en-US" smtClean="0"/>
               <a:t>‹#›</a:t>
             </a:fld>
@@ -2243,7 +2243,7 @@
     </p:spTree>
     <p:extLst>
       <p:ext uri="{BB962C8B-B14F-4D97-AF65-F5344CB8AC3E}">
-        <p14:creationId xmlns:p14="http://schemas.microsoft.com/office/powerpoint/2010/main" val="1301425801"/>
+        <p14:creationId xmlns:p14="http://schemas.microsoft.com/office/powerpoint/2010/main" val="3783974600"/>
       </p:ext>
     </p:extLst>
   </p:cSld>
@@ -2275,7 +2275,7 @@
           <p:cNvPr id="2" name="日付プレースホルダー 1">
             <a:extLst>
               <a:ext uri="{FF2B5EF4-FFF2-40B4-BE49-F238E27FC236}">
-                <a16:creationId xmlns:a16="http://schemas.microsoft.com/office/drawing/2014/main" id="{0216A36C-7752-9B53-2F5B-486D86132271}"/>
+                <a16:creationId xmlns:a16="http://schemas.microsoft.com/office/drawing/2014/main" id="{21FD6AED-AD98-0586-CA1A-252D7365EC2B}"/>
               </a:ext>
             </a:extLst>
           </p:cNvPr>
@@ -2291,7 +2291,7 @@
           <a:bodyPr/>
           <a:lstStyle/>
           <a:p>
-            <a:fld id="{0FB6FC17-8C7C-449E-BD4A-07BA56EDFDF1}" type="datetimeFigureOut">
+            <a:fld id="{17BF61B0-F343-4BBA-A03A-C6F8776FCB6F}" type="datetimeFigureOut">
               <a:rPr kumimoji="1" lang="ja-JP" altLang="en-US" smtClean="0"/>
               <a:t>2026/7/30</a:t>
             </a:fld>
@@ -2304,7 +2304,7 @@
           <p:cNvPr id="3" name="フッター プレースホルダー 2">
             <a:extLst>
               <a:ext uri="{FF2B5EF4-FFF2-40B4-BE49-F238E27FC236}">
-                <a16:creationId xmlns:a16="http://schemas.microsoft.com/office/drawing/2014/main" id="{6D2A4272-7021-5CB9-D677-439F03CD4E9C}"/>
+                <a16:creationId xmlns:a16="http://schemas.microsoft.com/office/drawing/2014/main" id="{B8298CE4-E505-9C86-091D-14D6A4E5DDF8}"/>
               </a:ext>
             </a:extLst>
           </p:cNvPr>
@@ -2329,7 +2329,7 @@
           <p:cNvPr id="4" name="スライド番号プレースホルダー 3">
             <a:extLst>
               <a:ext uri="{FF2B5EF4-FFF2-40B4-BE49-F238E27FC236}">
-                <a16:creationId xmlns:a16="http://schemas.microsoft.com/office/drawing/2014/main" id="{1F0774FE-8D47-E61A-730A-257CCA867467}"/>
+                <a16:creationId xmlns:a16="http://schemas.microsoft.com/office/drawing/2014/main" id="{338F0FE4-3B7E-D86F-9B91-A9EAA5929A82}"/>
               </a:ext>
             </a:extLst>
           </p:cNvPr>
@@ -2345,7 +2345,7 @@
           <a:bodyPr/>
           <a:lstStyle/>
           <a:p>
-            <a:fld id="{31E1BAFF-54C0-4196-8E78-B9FB4140FEC4}" type="slidenum">
+            <a:fld id="{1B529B5E-12CF-47B9-B0A9-F8D9F69288FD}" type="slidenum">
               <a:rPr kumimoji="1" lang="ja-JP" altLang="en-US" smtClean="0"/>
               <a:t>‹#›</a:t>
             </a:fld>
@@ -2356,7 +2356,7 @@
     </p:spTree>
     <p:extLst>
       <p:ext uri="{BB962C8B-B14F-4D97-AF65-F5344CB8AC3E}">
-        <p14:creationId xmlns:p14="http://schemas.microsoft.com/office/powerpoint/2010/main" val="860571128"/>
+        <p14:creationId xmlns:p14="http://schemas.microsoft.com/office/powerpoint/2010/main" val="3747952637"/>
       </p:ext>
     </p:extLst>
   </p:cSld>
@@ -2388,7 +2388,7 @@
           <p:cNvPr id="2" name="タイトル 1">
             <a:extLst>
               <a:ext uri="{FF2B5EF4-FFF2-40B4-BE49-F238E27FC236}">
-                <a16:creationId xmlns:a16="http://schemas.microsoft.com/office/drawing/2014/main" id="{F062EA2E-C075-5CEC-7645-3B856B98E372}"/>
+                <a16:creationId xmlns:a16="http://schemas.microsoft.com/office/drawing/2014/main" id="{87B8E11C-6654-EB88-6AB2-F93E4643213C}"/>
               </a:ext>
             </a:extLst>
           </p:cNvPr>
@@ -2425,7 +2425,7 @@
           <p:cNvPr id="3" name="コンテンツ プレースホルダー 2">
             <a:extLst>
               <a:ext uri="{FF2B5EF4-FFF2-40B4-BE49-F238E27FC236}">
-                <a16:creationId xmlns:a16="http://schemas.microsoft.com/office/drawing/2014/main" id="{0CADE1CF-8754-F44C-A0C4-DBEA14173A85}"/>
+                <a16:creationId xmlns:a16="http://schemas.microsoft.com/office/drawing/2014/main" id="{BDC9C73D-0C06-D80F-C484-E3DC03E312EC}"/>
               </a:ext>
             </a:extLst>
           </p:cNvPr>
@@ -2547,7 +2547,7 @@
           <p:cNvPr id="4" name="テキスト プレースホルダー 3">
             <a:extLst>
               <a:ext uri="{FF2B5EF4-FFF2-40B4-BE49-F238E27FC236}">
-                <a16:creationId xmlns:a16="http://schemas.microsoft.com/office/drawing/2014/main" id="{339A8C1E-823B-A2AE-21D2-32D351B314D1}"/>
+                <a16:creationId xmlns:a16="http://schemas.microsoft.com/office/drawing/2014/main" id="{3666D49E-4A35-D44C-2C3A-18DD590B6788}"/>
               </a:ext>
             </a:extLst>
           </p:cNvPr>
@@ -2618,7 +2618,7 @@
           <p:cNvPr id="5" name="日付プレースホルダー 4">
             <a:extLst>
               <a:ext uri="{FF2B5EF4-FFF2-40B4-BE49-F238E27FC236}">
-                <a16:creationId xmlns:a16="http://schemas.microsoft.com/office/drawing/2014/main" id="{B780F723-D0DF-ABDE-9002-51C4FCF454B2}"/>
+                <a16:creationId xmlns:a16="http://schemas.microsoft.com/office/drawing/2014/main" id="{3CF9331A-9DF7-5C4B-977F-595460329C85}"/>
               </a:ext>
             </a:extLst>
           </p:cNvPr>
@@ -2634,7 +2634,7 @@
           <a:bodyPr/>
           <a:lstStyle/>
           <a:p>
-            <a:fld id="{0FB6FC17-8C7C-449E-BD4A-07BA56EDFDF1}" type="datetimeFigureOut">
+            <a:fld id="{17BF61B0-F343-4BBA-A03A-C6F8776FCB6F}" type="datetimeFigureOut">
               <a:rPr kumimoji="1" lang="ja-JP" altLang="en-US" smtClean="0"/>
               <a:t>2026/7/30</a:t>
             </a:fld>
@@ -2647,7 +2647,7 @@
           <p:cNvPr id="6" name="フッター プレースホルダー 5">
             <a:extLst>
               <a:ext uri="{FF2B5EF4-FFF2-40B4-BE49-F238E27FC236}">
-                <a16:creationId xmlns:a16="http://schemas.microsoft.com/office/drawing/2014/main" id="{AE5F1950-1FC4-C9FD-F058-0C2C2843B3DD}"/>
+                <a16:creationId xmlns:a16="http://schemas.microsoft.com/office/drawing/2014/main" id="{FF87ED2D-75D2-6B64-8DAE-31645E1822AD}"/>
               </a:ext>
             </a:extLst>
           </p:cNvPr>
@@ -2672,7 +2672,7 @@
           <p:cNvPr id="7" name="スライド番号プレースホルダー 6">
             <a:extLst>
               <a:ext uri="{FF2B5EF4-FFF2-40B4-BE49-F238E27FC236}">
-                <a16:creationId xmlns:a16="http://schemas.microsoft.com/office/drawing/2014/main" id="{B738CB89-5693-E822-334A-D8AC7360CD5A}"/>
+                <a16:creationId xmlns:a16="http://schemas.microsoft.com/office/drawing/2014/main" id="{0D6ACF46-0D5B-4ABB-9A86-816933FD40E4}"/>
               </a:ext>
             </a:extLst>
           </p:cNvPr>
@@ -2688,7 +2688,7 @@
           <a:bodyPr/>
           <a:lstStyle/>
           <a:p>
-            <a:fld id="{31E1BAFF-54C0-4196-8E78-B9FB4140FEC4}" type="slidenum">
+            <a:fld id="{1B529B5E-12CF-47B9-B0A9-F8D9F69288FD}" type="slidenum">
               <a:rPr kumimoji="1" lang="ja-JP" altLang="en-US" smtClean="0"/>
               <a:t>‹#›</a:t>
             </a:fld>
@@ -2699,7 +2699,7 @@
     </p:spTree>
     <p:extLst>
       <p:ext uri="{BB962C8B-B14F-4D97-AF65-F5344CB8AC3E}">
-        <p14:creationId xmlns:p14="http://schemas.microsoft.com/office/powerpoint/2010/main" val="66084577"/>
+        <p14:creationId xmlns:p14="http://schemas.microsoft.com/office/powerpoint/2010/main" val="881286725"/>
       </p:ext>
     </p:extLst>
   </p:cSld>
@@ -2731,7 +2731,7 @@
           <p:cNvPr id="2" name="タイトル 1">
             <a:extLst>
               <a:ext uri="{FF2B5EF4-FFF2-40B4-BE49-F238E27FC236}">
-                <a16:creationId xmlns:a16="http://schemas.microsoft.com/office/drawing/2014/main" id="{D78BF66E-FEBA-7B91-02B8-7BFE33B6B8AE}"/>
+                <a16:creationId xmlns:a16="http://schemas.microsoft.com/office/drawing/2014/main" id="{AAA0487B-9882-C9DC-979C-C77496F90B20}"/>
               </a:ext>
             </a:extLst>
           </p:cNvPr>
@@ -2768,7 +2768,7 @@
           <p:cNvPr id="3" name="図プレースホルダー 2">
             <a:extLst>
               <a:ext uri="{FF2B5EF4-FFF2-40B4-BE49-F238E27FC236}">
-                <a16:creationId xmlns:a16="http://schemas.microsoft.com/office/drawing/2014/main" id="{D137EC79-164A-CE19-4F02-48538368DD6F}"/>
+                <a16:creationId xmlns:a16="http://schemas.microsoft.com/office/drawing/2014/main" id="{8397AA73-11E2-3DD8-18EA-AE38F4758D19}"/>
               </a:ext>
             </a:extLst>
           </p:cNvPr>
@@ -2835,7 +2835,7 @@
           <p:cNvPr id="4" name="テキスト プレースホルダー 3">
             <a:extLst>
               <a:ext uri="{FF2B5EF4-FFF2-40B4-BE49-F238E27FC236}">
-                <a16:creationId xmlns:a16="http://schemas.microsoft.com/office/drawing/2014/main" id="{819AACA8-ED71-5561-1924-3F527C0B5F64}"/>
+                <a16:creationId xmlns:a16="http://schemas.microsoft.com/office/drawing/2014/main" id="{12B1CA50-49D0-2481-207D-96456BCA9114}"/>
               </a:ext>
             </a:extLst>
           </p:cNvPr>
@@ -2906,7 +2906,7 @@
           <p:cNvPr id="5" name="日付プレースホルダー 4">
             <a:extLst>
               <a:ext uri="{FF2B5EF4-FFF2-40B4-BE49-F238E27FC236}">
-                <a16:creationId xmlns:a16="http://schemas.microsoft.com/office/drawing/2014/main" id="{9FE41EAF-2A9E-AE8C-DA0F-D1F4A458154D}"/>
+                <a16:creationId xmlns:a16="http://schemas.microsoft.com/office/drawing/2014/main" id="{BE39D3E3-C9C6-4B35-DFF2-0F3F8DD60DC5}"/>
               </a:ext>
             </a:extLst>
           </p:cNvPr>
@@ -2922,7 +2922,7 @@
           <a:bodyPr/>
           <a:lstStyle/>
           <a:p>
-            <a:fld id="{0FB6FC17-8C7C-449E-BD4A-07BA56EDFDF1}" type="datetimeFigureOut">
+            <a:fld id="{17BF61B0-F343-4BBA-A03A-C6F8776FCB6F}" type="datetimeFigureOut">
               <a:rPr kumimoji="1" lang="ja-JP" altLang="en-US" smtClean="0"/>
               <a:t>2026/7/30</a:t>
             </a:fld>
@@ -2935,7 +2935,7 @@
           <p:cNvPr id="6" name="フッター プレースホルダー 5">
             <a:extLst>
               <a:ext uri="{FF2B5EF4-FFF2-40B4-BE49-F238E27FC236}">
-                <a16:creationId xmlns:a16="http://schemas.microsoft.com/office/drawing/2014/main" id="{A38E7714-39F9-7926-A706-2A2642A1A245}"/>
+                <a16:creationId xmlns:a16="http://schemas.microsoft.com/office/drawing/2014/main" id="{9B60319C-B595-1272-005C-81922844C274}"/>
               </a:ext>
             </a:extLst>
           </p:cNvPr>
@@ -2960,7 +2960,7 @@
           <p:cNvPr id="7" name="スライド番号プレースホルダー 6">
             <a:extLst>
               <a:ext uri="{FF2B5EF4-FFF2-40B4-BE49-F238E27FC236}">
-                <a16:creationId xmlns:a16="http://schemas.microsoft.com/office/drawing/2014/main" id="{2DF6D5D1-7257-8475-8FDE-5BA6197ED457}"/>
+                <a16:creationId xmlns:a16="http://schemas.microsoft.com/office/drawing/2014/main" id="{83B9CDB7-4A58-1CE6-7867-49999CFB1C3A}"/>
               </a:ext>
             </a:extLst>
           </p:cNvPr>
@@ -2976,7 +2976,7 @@
           <a:bodyPr/>
           <a:lstStyle/>
           <a:p>
-            <a:fld id="{31E1BAFF-54C0-4196-8E78-B9FB4140FEC4}" type="slidenum">
+            <a:fld id="{1B529B5E-12CF-47B9-B0A9-F8D9F69288FD}" type="slidenum">
               <a:rPr kumimoji="1" lang="ja-JP" altLang="en-US" smtClean="0"/>
               <a:t>‹#›</a:t>
             </a:fld>
@@ -2987,7 +2987,7 @@
     </p:spTree>
     <p:extLst>
       <p:ext uri="{BB962C8B-B14F-4D97-AF65-F5344CB8AC3E}">
-        <p14:creationId xmlns:p14="http://schemas.microsoft.com/office/powerpoint/2010/main" val="4145960416"/>
+        <p14:creationId xmlns:p14="http://schemas.microsoft.com/office/powerpoint/2010/main" val="1252918273"/>
       </p:ext>
     </p:extLst>
   </p:cSld>
@@ -3024,7 +3024,7 @@
           <p:cNvPr id="2" name="タイトル プレースホルダー 1">
             <a:extLst>
               <a:ext uri="{FF2B5EF4-FFF2-40B4-BE49-F238E27FC236}">
-                <a16:creationId xmlns:a16="http://schemas.microsoft.com/office/drawing/2014/main" id="{2003440D-F0C5-1481-FE3B-69488FE9570F}"/>
+                <a16:creationId xmlns:a16="http://schemas.microsoft.com/office/drawing/2014/main" id="{BB671650-E5A4-E8BF-A37B-1AE48E687CED}"/>
               </a:ext>
             </a:extLst>
           </p:cNvPr>
@@ -3062,7 +3062,7 @@
           <p:cNvPr id="3" name="テキスト プレースホルダー 2">
             <a:extLst>
               <a:ext uri="{FF2B5EF4-FFF2-40B4-BE49-F238E27FC236}">
-                <a16:creationId xmlns:a16="http://schemas.microsoft.com/office/drawing/2014/main" id="{D057FA0D-C8D8-3E9C-2336-3CE83E10C6BE}"/>
+                <a16:creationId xmlns:a16="http://schemas.microsoft.com/office/drawing/2014/main" id="{8C131D61-23FD-8AC3-EFD5-C4C5E8284F6A}"/>
               </a:ext>
             </a:extLst>
           </p:cNvPr>
@@ -3161,7 +3161,7 @@
           <p:cNvPr id="4" name="日付プレースホルダー 3">
             <a:extLst>
               <a:ext uri="{FF2B5EF4-FFF2-40B4-BE49-F238E27FC236}">
-                <a16:creationId xmlns:a16="http://schemas.microsoft.com/office/drawing/2014/main" id="{F9625E57-963E-9CA1-8F2C-9B621958DFC1}"/>
+                <a16:creationId xmlns:a16="http://schemas.microsoft.com/office/drawing/2014/main" id="{81B948C3-5DF3-6F97-1CE6-ABA05C89695C}"/>
               </a:ext>
             </a:extLst>
           </p:cNvPr>
@@ -3195,7 +3195,7 @@
             </a:lvl1pPr>
           </a:lstStyle>
           <a:p>
-            <a:fld id="{0FB6FC17-8C7C-449E-BD4A-07BA56EDFDF1}" type="datetimeFigureOut">
+            <a:fld id="{17BF61B0-F343-4BBA-A03A-C6F8776FCB6F}" type="datetimeFigureOut">
               <a:rPr kumimoji="1" lang="ja-JP" altLang="en-US" smtClean="0"/>
               <a:t>2026/7/30</a:t>
             </a:fld>
@@ -3208,7 +3208,7 @@
           <p:cNvPr id="5" name="フッター プレースホルダー 4">
             <a:extLst>
               <a:ext uri="{FF2B5EF4-FFF2-40B4-BE49-F238E27FC236}">
-                <a16:creationId xmlns:a16="http://schemas.microsoft.com/office/drawing/2014/main" id="{A49C1AA4-5F5E-8CCF-A147-58C3319B6278}"/>
+                <a16:creationId xmlns:a16="http://schemas.microsoft.com/office/drawing/2014/main" id="{EA8268DC-3CF6-3787-7414-DB8EE82BCC17}"/>
               </a:ext>
             </a:extLst>
           </p:cNvPr>
@@ -3251,7 +3251,7 @@
           <p:cNvPr id="6" name="スライド番号プレースホルダー 5">
             <a:extLst>
               <a:ext uri="{FF2B5EF4-FFF2-40B4-BE49-F238E27FC236}">
-                <a16:creationId xmlns:a16="http://schemas.microsoft.com/office/drawing/2014/main" id="{C86279D0-0052-41EB-76D6-509A0334E4D9}"/>
+                <a16:creationId xmlns:a16="http://schemas.microsoft.com/office/drawing/2014/main" id="{B5B971F2-F812-1E90-3788-8A262AE9486B}"/>
               </a:ext>
             </a:extLst>
           </p:cNvPr>
@@ -3285,7 +3285,7 @@
             </a:lvl1pPr>
           </a:lstStyle>
           <a:p>
-            <a:fld id="{31E1BAFF-54C0-4196-8E78-B9FB4140FEC4}" type="slidenum">
+            <a:fld id="{1B529B5E-12CF-47B9-B0A9-F8D9F69288FD}" type="slidenum">
               <a:rPr kumimoji="1" lang="ja-JP" altLang="en-US" smtClean="0"/>
               <a:t>‹#›</a:t>
             </a:fld>
@@ -3296,7 +3296,7 @@
     </p:spTree>
     <p:extLst>
       <p:ext uri="{BB962C8B-B14F-4D97-AF65-F5344CB8AC3E}">
-        <p14:creationId xmlns:p14="http://schemas.microsoft.com/office/powerpoint/2010/main" val="3971503400"/>
+        <p14:creationId xmlns:p14="http://schemas.microsoft.com/office/powerpoint/2010/main" val="1963584406"/>
       </p:ext>
     </p:extLst>
   </p:cSld>
@@ -3619,7 +3619,7 @@
           <p:cNvPr id="2" name="テキスト ボックス 1">
             <a:extLst>
               <a:ext uri="{FF2B5EF4-FFF2-40B4-BE49-F238E27FC236}">
-                <a16:creationId xmlns:a16="http://schemas.microsoft.com/office/drawing/2014/main" id="{2D067CE1-033E-7F7C-C740-B56B646243D8}"/>
+                <a16:creationId xmlns:a16="http://schemas.microsoft.com/office/drawing/2014/main" id="{AC378B76-CBB6-CC02-5E97-EF6A1491C97C}"/>
               </a:ext>
             </a:extLst>
           </p:cNvPr>
@@ -3665,7 +3665,7 @@
           <p:cNvPr id="3" name="テキスト ボックス 2">
             <a:extLst>
               <a:ext uri="{FF2B5EF4-FFF2-40B4-BE49-F238E27FC236}">
-                <a16:creationId xmlns:a16="http://schemas.microsoft.com/office/drawing/2014/main" id="{C5F2FF6D-37E4-D7D7-FFA3-BB2A1110FEFC}"/>
+                <a16:creationId xmlns:a16="http://schemas.microsoft.com/office/drawing/2014/main" id="{0B0EB819-5ADF-2EA2-A687-DC7546135302}"/>
               </a:ext>
             </a:extLst>
           </p:cNvPr>
@@ -3714,7 +3714,7 @@
           <p:cNvPr id="4" name="テキスト ボックス 3">
             <a:extLst>
               <a:ext uri="{FF2B5EF4-FFF2-40B4-BE49-F238E27FC236}">
-                <a16:creationId xmlns:a16="http://schemas.microsoft.com/office/drawing/2014/main" id="{82A18D1D-DE17-38D5-D7E0-3842072E5230}"/>
+                <a16:creationId xmlns:a16="http://schemas.microsoft.com/office/drawing/2014/main" id="{6D3472FC-44B6-7B11-8D60-5B681863FE34}"/>
               </a:ext>
             </a:extLst>
           </p:cNvPr>
@@ -3754,7 +3754,7 @@
           <p:cNvPr id="5" name="テキスト ボックス 4">
             <a:extLst>
               <a:ext uri="{FF2B5EF4-FFF2-40B4-BE49-F238E27FC236}">
-                <a16:creationId xmlns:a16="http://schemas.microsoft.com/office/drawing/2014/main" id="{11FE48FC-6CB3-29E2-B46B-3ED7620AE3E9}"/>
+                <a16:creationId xmlns:a16="http://schemas.microsoft.com/office/drawing/2014/main" id="{A210D564-3523-CAFA-EDD8-E581C83664F8}"/>
               </a:ext>
             </a:extLst>
           </p:cNvPr>
@@ -3801,7 +3801,7 @@
             <a:hlinkClick r:id="" action="ppaction://media"/>
             <a:extLst>
               <a:ext uri="{FF2B5EF4-FFF2-40B4-BE49-F238E27FC236}">
-                <a16:creationId xmlns:a16="http://schemas.microsoft.com/office/drawing/2014/main" id="{11E9E798-5D24-7347-CCC4-F841A1EFC824}"/>
+                <a16:creationId xmlns:a16="http://schemas.microsoft.com/office/drawing/2014/main" id="{B93ED3C8-02D5-B97B-8B54-831EBAF21AA2}"/>
               </a:ext>
             </a:extLst>
           </p:cNvPr>
@@ -3836,7 +3836,7 @@
     </p:spTree>
     <p:extLst>
       <p:ext uri="{BB962C8B-B14F-4D97-AF65-F5344CB8AC3E}">
-        <p14:creationId xmlns:p14="http://schemas.microsoft.com/office/powerpoint/2010/main" val="371486715"/>
+        <p14:creationId xmlns:p14="http://schemas.microsoft.com/office/powerpoint/2010/main" val="948848908"/>
       </p:ext>
     </p:extLst>
   </p:cSld>
@@ -3960,7 +3960,7 @@
           <p:cNvPr id="2" name="テキスト ボックス 1">
             <a:extLst>
               <a:ext uri="{FF2B5EF4-FFF2-40B4-BE49-F238E27FC236}">
-                <a16:creationId xmlns:a16="http://schemas.microsoft.com/office/drawing/2014/main" id="{CF514C80-2594-DA32-E435-CB8807E1AEF1}"/>
+                <a16:creationId xmlns:a16="http://schemas.microsoft.com/office/drawing/2014/main" id="{076F99D1-C097-67FC-A7BA-18E786F7BE5B}"/>
               </a:ext>
             </a:extLst>
           </p:cNvPr>
@@ -4006,7 +4006,7 @@
           <p:cNvPr id="3" name="テキスト ボックス 2">
             <a:extLst>
               <a:ext uri="{FF2B5EF4-FFF2-40B4-BE49-F238E27FC236}">
-                <a16:creationId xmlns:a16="http://schemas.microsoft.com/office/drawing/2014/main" id="{E9C76881-B115-6951-ED23-3A4A100D1C84}"/>
+                <a16:creationId xmlns:a16="http://schemas.microsoft.com/office/drawing/2014/main" id="{9D5D198F-A595-61B4-6AF5-F9188E155ED4}"/>
               </a:ext>
             </a:extLst>
           </p:cNvPr>
@@ -4046,7 +4046,7 @@
           <p:cNvPr id="4" name="テキスト ボックス 3">
             <a:extLst>
               <a:ext uri="{FF2B5EF4-FFF2-40B4-BE49-F238E27FC236}">
-                <a16:creationId xmlns:a16="http://schemas.microsoft.com/office/drawing/2014/main" id="{575CC233-192B-AD4D-5C47-FA0627C7202C}"/>
+                <a16:creationId xmlns:a16="http://schemas.microsoft.com/office/drawing/2014/main" id="{993047DA-D1BF-AE21-BA6F-3364EB6B6F72}"/>
               </a:ext>
             </a:extLst>
           </p:cNvPr>
@@ -4095,7 +4095,7 @@
           <p:cNvPr id="5" name="テキスト ボックス 4">
             <a:extLst>
               <a:ext uri="{FF2B5EF4-FFF2-40B4-BE49-F238E27FC236}">
-                <a16:creationId xmlns:a16="http://schemas.microsoft.com/office/drawing/2014/main" id="{331013EF-5327-8C29-E971-4E6BBB0A6CD2}"/>
+                <a16:creationId xmlns:a16="http://schemas.microsoft.com/office/drawing/2014/main" id="{14CA01D4-0D63-B7AF-55BD-C654ACAAFC92}"/>
               </a:ext>
             </a:extLst>
           </p:cNvPr>
@@ -4142,7 +4142,7 @@
             <a:hlinkClick r:id="" action="ppaction://media"/>
             <a:extLst>
               <a:ext uri="{FF2B5EF4-FFF2-40B4-BE49-F238E27FC236}">
-                <a16:creationId xmlns:a16="http://schemas.microsoft.com/office/drawing/2014/main" id="{9B562D02-3E48-3428-A647-9836A1D9F574}"/>
+                <a16:creationId xmlns:a16="http://schemas.microsoft.com/office/drawing/2014/main" id="{82A4E734-0E82-E417-93E9-21E9DB62619F}"/>
               </a:ext>
             </a:extLst>
           </p:cNvPr>
@@ -4177,7 +4177,7 @@
     </p:spTree>
     <p:extLst>
       <p:ext uri="{BB962C8B-B14F-4D97-AF65-F5344CB8AC3E}">
-        <p14:creationId xmlns:p14="http://schemas.microsoft.com/office/powerpoint/2010/main" val="4069291697"/>
+        <p14:creationId xmlns:p14="http://schemas.microsoft.com/office/powerpoint/2010/main" val="587329153"/>
       </p:ext>
     </p:extLst>
   </p:cSld>
@@ -4301,7 +4301,7 @@
           <p:cNvPr id="2" name="テキスト ボックス 1">
             <a:extLst>
               <a:ext uri="{FF2B5EF4-FFF2-40B4-BE49-F238E27FC236}">
-                <a16:creationId xmlns:a16="http://schemas.microsoft.com/office/drawing/2014/main" id="{BEC102E3-50E6-AF05-87FB-95524904C6D4}"/>
+                <a16:creationId xmlns:a16="http://schemas.microsoft.com/office/drawing/2014/main" id="{B7FE91C6-FBF1-6F25-300D-BF3D714CCA6A}"/>
               </a:ext>
             </a:extLst>
           </p:cNvPr>
@@ -4347,7 +4347,7 @@
           <p:cNvPr id="3" name="テキスト ボックス 2">
             <a:extLst>
               <a:ext uri="{FF2B5EF4-FFF2-40B4-BE49-F238E27FC236}">
-                <a16:creationId xmlns:a16="http://schemas.microsoft.com/office/drawing/2014/main" id="{665423ED-D488-8CA6-C873-FB9D46CF51DF}"/>
+                <a16:creationId xmlns:a16="http://schemas.microsoft.com/office/drawing/2014/main" id="{CF78EACD-8CCB-3B00-2DCF-2FFD3D8E4534}"/>
               </a:ext>
             </a:extLst>
           </p:cNvPr>
@@ -4387,7 +4387,7 @@
           <p:cNvPr id="4" name="テキスト ボックス 3">
             <a:extLst>
               <a:ext uri="{FF2B5EF4-FFF2-40B4-BE49-F238E27FC236}">
-                <a16:creationId xmlns:a16="http://schemas.microsoft.com/office/drawing/2014/main" id="{CBA5E9A6-E1EF-13F3-9C38-8FB1B740AE51}"/>
+                <a16:creationId xmlns:a16="http://schemas.microsoft.com/office/drawing/2014/main" id="{3CE3E7ED-3D28-EC8F-8841-482CA4BC3FFC}"/>
               </a:ext>
             </a:extLst>
           </p:cNvPr>
@@ -4482,7 +4482,7 @@
           <p:cNvPr id="5" name="テキスト ボックス 4">
             <a:extLst>
               <a:ext uri="{FF2B5EF4-FFF2-40B4-BE49-F238E27FC236}">
-                <a16:creationId xmlns:a16="http://schemas.microsoft.com/office/drawing/2014/main" id="{E9FE40CC-F12D-656A-60EE-EBC7D6CD1372}"/>
+                <a16:creationId xmlns:a16="http://schemas.microsoft.com/office/drawing/2014/main" id="{D954EECA-2AF4-DDC1-DB46-13A3FA3050A7}"/>
               </a:ext>
             </a:extLst>
           </p:cNvPr>
@@ -4529,7 +4529,7 @@
             <a:hlinkClick r:id="" action="ppaction://media"/>
             <a:extLst>
               <a:ext uri="{FF2B5EF4-FFF2-40B4-BE49-F238E27FC236}">
-                <a16:creationId xmlns:a16="http://schemas.microsoft.com/office/drawing/2014/main" id="{462DB8B4-4264-E48C-CA3D-E9B8C644AB6D}"/>
+                <a16:creationId xmlns:a16="http://schemas.microsoft.com/office/drawing/2014/main" id="{248B9CC3-B595-2491-2229-8AEE42FA197B}"/>
               </a:ext>
             </a:extLst>
           </p:cNvPr>
@@ -4564,7 +4564,7 @@
     </p:spTree>
     <p:extLst>
       <p:ext uri="{BB962C8B-B14F-4D97-AF65-F5344CB8AC3E}">
-        <p14:creationId xmlns:p14="http://schemas.microsoft.com/office/powerpoint/2010/main" val="4040726715"/>
+        <p14:creationId xmlns:p14="http://schemas.microsoft.com/office/powerpoint/2010/main" val="2595087226"/>
       </p:ext>
     </p:extLst>
   </p:cSld>
@@ -4688,7 +4688,7 @@
           <p:cNvPr id="2" name="テキスト ボックス 1">
             <a:extLst>
               <a:ext uri="{FF2B5EF4-FFF2-40B4-BE49-F238E27FC236}">
-                <a16:creationId xmlns:a16="http://schemas.microsoft.com/office/drawing/2014/main" id="{45267A2B-1578-D5DC-7E0A-05B6BA21D75B}"/>
+                <a16:creationId xmlns:a16="http://schemas.microsoft.com/office/drawing/2014/main" id="{51856F8E-86FA-50CC-9F4B-ECB45987DA3D}"/>
               </a:ext>
             </a:extLst>
           </p:cNvPr>
@@ -4734,7 +4734,7 @@
           <p:cNvPr id="3" name="テキスト ボックス 2">
             <a:extLst>
               <a:ext uri="{FF2B5EF4-FFF2-40B4-BE49-F238E27FC236}">
-                <a16:creationId xmlns:a16="http://schemas.microsoft.com/office/drawing/2014/main" id="{E4559CC4-7DC9-D298-CA18-46C3526B1051}"/>
+                <a16:creationId xmlns:a16="http://schemas.microsoft.com/office/drawing/2014/main" id="{5BD1F33B-73E4-A172-25D5-037F88A242D1}"/>
               </a:ext>
             </a:extLst>
           </p:cNvPr>
@@ -4774,7 +4774,7 @@
           <p:cNvPr id="4" name="テキスト ボックス 3">
             <a:extLst>
               <a:ext uri="{FF2B5EF4-FFF2-40B4-BE49-F238E27FC236}">
-                <a16:creationId xmlns:a16="http://schemas.microsoft.com/office/drawing/2014/main" id="{2371C4C0-0887-8354-7D1A-62896DB2C548}"/>
+                <a16:creationId xmlns:a16="http://schemas.microsoft.com/office/drawing/2014/main" id="{4B53330D-DF6D-9964-5E1C-29EEC1E6F3FE}"/>
               </a:ext>
             </a:extLst>
           </p:cNvPr>
@@ -4884,7 +4884,7 @@
           <p:cNvPr id="5" name="テキスト ボックス 4">
             <a:extLst>
               <a:ext uri="{FF2B5EF4-FFF2-40B4-BE49-F238E27FC236}">
-                <a16:creationId xmlns:a16="http://schemas.microsoft.com/office/drawing/2014/main" id="{2BF8970E-3448-C5E7-DCC3-C4998EC517FA}"/>
+                <a16:creationId xmlns:a16="http://schemas.microsoft.com/office/drawing/2014/main" id="{B5DD4C5A-E888-E8F7-A2DF-E583471D889E}"/>
               </a:ext>
             </a:extLst>
           </p:cNvPr>
@@ -4931,7 +4931,7 @@
             <a:hlinkClick r:id="" action="ppaction://media"/>
             <a:extLst>
               <a:ext uri="{FF2B5EF4-FFF2-40B4-BE49-F238E27FC236}">
-                <a16:creationId xmlns:a16="http://schemas.microsoft.com/office/drawing/2014/main" id="{DEE34F56-7FFA-04D2-77B8-2DA6F91A38EF}"/>
+                <a16:creationId xmlns:a16="http://schemas.microsoft.com/office/drawing/2014/main" id="{B8DFD448-FC89-13E8-84F0-52E00759F6BC}"/>
               </a:ext>
             </a:extLst>
           </p:cNvPr>
@@ -4966,7 +4966,7 @@
     </p:spTree>
     <p:extLst>
       <p:ext uri="{BB962C8B-B14F-4D97-AF65-F5344CB8AC3E}">
-        <p14:creationId xmlns:p14="http://schemas.microsoft.com/office/powerpoint/2010/main" val="2597704332"/>
+        <p14:creationId xmlns:p14="http://schemas.microsoft.com/office/powerpoint/2010/main" val="741343250"/>
       </p:ext>
     </p:extLst>
   </p:cSld>
@@ -5090,7 +5090,7 @@
           <p:cNvPr id="2" name="テキスト ボックス 1">
             <a:extLst>
               <a:ext uri="{FF2B5EF4-FFF2-40B4-BE49-F238E27FC236}">
-                <a16:creationId xmlns:a16="http://schemas.microsoft.com/office/drawing/2014/main" id="{516D08F4-A56C-157B-6100-DD7587576E57}"/>
+                <a16:creationId xmlns:a16="http://schemas.microsoft.com/office/drawing/2014/main" id="{A2713138-B2DE-274D-92A0-B5961B12046A}"/>
               </a:ext>
             </a:extLst>
           </p:cNvPr>
@@ -5136,7 +5136,7 @@
           <p:cNvPr id="3" name="テキスト ボックス 2">
             <a:extLst>
               <a:ext uri="{FF2B5EF4-FFF2-40B4-BE49-F238E27FC236}">
-                <a16:creationId xmlns:a16="http://schemas.microsoft.com/office/drawing/2014/main" id="{2F43AA5F-B712-FD5A-2E08-9A0E13D70528}"/>
+                <a16:creationId xmlns:a16="http://schemas.microsoft.com/office/drawing/2014/main" id="{FB29BA9D-F76D-30ED-86B4-10188509FD6B}"/>
               </a:ext>
             </a:extLst>
           </p:cNvPr>
@@ -5176,7 +5176,7 @@
           <p:cNvPr id="4" name="テキスト ボックス 3">
             <a:extLst>
               <a:ext uri="{FF2B5EF4-FFF2-40B4-BE49-F238E27FC236}">
-                <a16:creationId xmlns:a16="http://schemas.microsoft.com/office/drawing/2014/main" id="{428D3463-50AB-7D20-7A87-4051329684F2}"/>
+                <a16:creationId xmlns:a16="http://schemas.microsoft.com/office/drawing/2014/main" id="{1488E4E2-E25A-9102-EA4F-22612DDCBBBB}"/>
               </a:ext>
             </a:extLst>
           </p:cNvPr>
@@ -5200,20 +5200,14 @@
           <a:lstStyle/>
           <a:p>
             <a:r>
-              <a:rPr kumimoji="1" lang="en-US" altLang="ja-JP" sz="2000">
+              <a:rPr kumimoji="1" lang="ja-JP" altLang="en-US" sz="2000">
                 <a:solidFill>
                   <a:srgbClr val="333333"/>
                 </a:solidFill>
                 <a:latin typeface="Arial" panose="020B0604020202020204" pitchFamily="34" charset="0"/>
               </a:rPr>
-              <a:t>Configure root as Vercel output directory for static site</a:t>
-            </a:r>
-            <a:endParaRPr kumimoji="1" lang="ja-JP" altLang="en-US" sz="2000">
-              <a:solidFill>
-                <a:srgbClr val="333333"/>
-              </a:solidFill>
-              <a:latin typeface="Arial" panose="020B0604020202020204" pitchFamily="34" charset="0"/>
-            </a:endParaRPr>
+              <a:t>直近のコミットでは、実装の見直しと継続的な改善が行われました。</a:t>
+            </a:r>
           </a:p>
         </p:txBody>
       </p:sp>
@@ -5222,7 +5216,7 @@
           <p:cNvPr id="5" name="テキスト ボックス 4">
             <a:extLst>
               <a:ext uri="{FF2B5EF4-FFF2-40B4-BE49-F238E27FC236}">
-                <a16:creationId xmlns:a16="http://schemas.microsoft.com/office/drawing/2014/main" id="{7913481B-D6A3-5CA4-2BE4-31A9EB21BE59}"/>
+                <a16:creationId xmlns:a16="http://schemas.microsoft.com/office/drawing/2014/main" id="{5494120A-6AAC-D574-2D6A-9CB0D2E3F8D8}"/>
               </a:ext>
             </a:extLst>
           </p:cNvPr>
@@ -5269,7 +5263,7 @@
             <a:hlinkClick r:id="" action="ppaction://media"/>
             <a:extLst>
               <a:ext uri="{FF2B5EF4-FFF2-40B4-BE49-F238E27FC236}">
-                <a16:creationId xmlns:a16="http://schemas.microsoft.com/office/drawing/2014/main" id="{250E091C-F0A6-70BD-9A5A-F17FE0F0BCA5}"/>
+                <a16:creationId xmlns:a16="http://schemas.microsoft.com/office/drawing/2014/main" id="{76DF3A8B-709A-4C31-8812-E214284BF4DE}"/>
               </a:ext>
             </a:extLst>
           </p:cNvPr>
@@ -5304,7 +5298,7 @@
     </p:spTree>
     <p:extLst>
       <p:ext uri="{BB962C8B-B14F-4D97-AF65-F5344CB8AC3E}">
-        <p14:creationId xmlns:p14="http://schemas.microsoft.com/office/powerpoint/2010/main" val="63906436"/>
+        <p14:creationId xmlns:p14="http://schemas.microsoft.com/office/powerpoint/2010/main" val="194651600"/>
       </p:ext>
     </p:extLst>
   </p:cSld>
@@ -5313,10 +5307,10 @@
   </p:clrMapOvr>
   <mc:AlternateContent xmlns:mc="http://schemas.openxmlformats.org/markup-compatibility/2006">
     <mc:Choice xmlns:p14="http://schemas.microsoft.com/office/powerpoint/2010/main" Requires="p14">
-      <p:transition spd="slow" p14:dur="2000" advTm="9000"/>
+      <p:transition spd="slow" p14:dur="2000" advTm="7000"/>
     </mc:Choice>
     <mc:Fallback>
-      <p:transition spd="slow" advTm="9000"/>
+      <p:transition spd="slow" advTm="7000"/>
     </mc:Fallback>
   </mc:AlternateContent>
   <p:timing>
@@ -5347,7 +5341,7 @@
                                   <p:childTnLst>
                                     <p:cmd type="call" cmd="playFrom(0.0)">
                                       <p:cBhvr>
-                                        <p:cTn id="6" dur="8530" fill="hold"/>
+                                        <p:cTn id="6" dur="6076" fill="hold"/>
                                         <p:tgtEl>
                                           <p:spTgt spid="6"/>
                                         </p:tgtEl>
@@ -5428,7 +5422,7 @@
           <p:cNvPr id="2" name="テキスト ボックス 1">
             <a:extLst>
               <a:ext uri="{FF2B5EF4-FFF2-40B4-BE49-F238E27FC236}">
-                <a16:creationId xmlns:a16="http://schemas.microsoft.com/office/drawing/2014/main" id="{23D16E94-3BCC-1DB6-14B4-F48B2722D610}"/>
+                <a16:creationId xmlns:a16="http://schemas.microsoft.com/office/drawing/2014/main" id="{0293250C-3974-1A6D-93C9-630F6B17F4BA}"/>
               </a:ext>
             </a:extLst>
           </p:cNvPr>
@@ -5474,7 +5468,7 @@
           <p:cNvPr id="3" name="テキスト ボックス 2">
             <a:extLst>
               <a:ext uri="{FF2B5EF4-FFF2-40B4-BE49-F238E27FC236}">
-                <a16:creationId xmlns:a16="http://schemas.microsoft.com/office/drawing/2014/main" id="{29745096-178E-E18D-09D7-2EE9F2AF5590}"/>
+                <a16:creationId xmlns:a16="http://schemas.microsoft.com/office/drawing/2014/main" id="{C1343CCC-F29A-62AA-ED06-576503592D20}"/>
               </a:ext>
             </a:extLst>
           </p:cNvPr>
@@ -5514,7 +5508,7 @@
           <p:cNvPr id="4" name="テキスト ボックス 3">
             <a:extLst>
               <a:ext uri="{FF2B5EF4-FFF2-40B4-BE49-F238E27FC236}">
-                <a16:creationId xmlns:a16="http://schemas.microsoft.com/office/drawing/2014/main" id="{D1C051C8-4FE7-8901-786B-A08F981E06AF}"/>
+                <a16:creationId xmlns:a16="http://schemas.microsoft.com/office/drawing/2014/main" id="{FE535D79-AE2E-73B9-60E7-E9BB99450609}"/>
               </a:ext>
             </a:extLst>
           </p:cNvPr>
@@ -5579,7 +5573,7 @@
           <p:cNvPr id="5" name="テキスト ボックス 4">
             <a:extLst>
               <a:ext uri="{FF2B5EF4-FFF2-40B4-BE49-F238E27FC236}">
-                <a16:creationId xmlns:a16="http://schemas.microsoft.com/office/drawing/2014/main" id="{0A325FFE-3AFA-E492-C60A-35183AFA778D}"/>
+                <a16:creationId xmlns:a16="http://schemas.microsoft.com/office/drawing/2014/main" id="{E01E1A64-B13A-1790-255E-D6E86812AD32}"/>
               </a:ext>
             </a:extLst>
           </p:cNvPr>
@@ -5626,7 +5620,7 @@
             <a:hlinkClick r:id="" action="ppaction://media"/>
             <a:extLst>
               <a:ext uri="{FF2B5EF4-FFF2-40B4-BE49-F238E27FC236}">
-                <a16:creationId xmlns:a16="http://schemas.microsoft.com/office/drawing/2014/main" id="{AD49BA08-F2BF-5A88-9D2F-5FC82270B2E7}"/>
+                <a16:creationId xmlns:a16="http://schemas.microsoft.com/office/drawing/2014/main" id="{8CECFFFC-E107-3A5A-6965-CE24579680E8}"/>
               </a:ext>
             </a:extLst>
           </p:cNvPr>
@@ -5661,7 +5655,7 @@
     </p:spTree>
     <p:extLst>
       <p:ext uri="{BB962C8B-B14F-4D97-AF65-F5344CB8AC3E}">
-        <p14:creationId xmlns:p14="http://schemas.microsoft.com/office/powerpoint/2010/main" val="4066784266"/>
+        <p14:creationId xmlns:p14="http://schemas.microsoft.com/office/powerpoint/2010/main" val="131781391"/>
       </p:ext>
     </p:extLst>
   </p:cSld>
